--- a/docs/summit_20261023_reframe/poster_qwen_architecture_review.pptx
+++ b/docs/summit_20261023_reframe/poster_qwen_architecture_review.pptx
@@ -3112,8 +3112,8 @@
         </p:blipFill>
         <p:spPr>
           <a:xfrm>
-            <a:off x="20817048" y="13024939"/>
-            <a:ext cx="8459046" cy="8104247"/>
+            <a:off x="20795141" y="11535102"/>
+            <a:ext cx="8459044" cy="7951823"/>
           </a:xfrm>
           <a:prstGeom prst="rect">
             <a:avLst/>
@@ -3136,7 +3136,7 @@
         </p:blipFill>
         <p:spPr>
           <a:xfrm>
-            <a:off x="22730947" y="13847643"/>
+            <a:off x="22709040" y="12307563"/>
             <a:ext cx="203200" cy="292913"/>
           </a:xfrm>
           <a:prstGeom prst="rect">
@@ -3160,8 +3160,8 @@
         </p:blipFill>
         <p:spPr>
           <a:xfrm>
-            <a:off x="22730947" y="14996555"/>
-            <a:ext cx="203200" cy="292915"/>
+            <a:off x="22709040" y="13456476"/>
+            <a:ext cx="203200" cy="292913"/>
           </a:xfrm>
           <a:prstGeom prst="rect">
             <a:avLst/>
@@ -3184,8 +3184,8 @@
         </p:blipFill>
         <p:spPr>
           <a:xfrm>
-            <a:off x="27158996" y="13797399"/>
-            <a:ext cx="203200" cy="292915"/>
+            <a:off x="27137090" y="12307563"/>
+            <a:ext cx="203200" cy="292913"/>
           </a:xfrm>
           <a:prstGeom prst="rect">
             <a:avLst/>
@@ -3208,7 +3208,7 @@
         </p:blipFill>
         <p:spPr>
           <a:xfrm>
-            <a:off x="27158996" y="14946314"/>
+            <a:off x="27137090" y="13456476"/>
             <a:ext cx="203200" cy="292913"/>
           </a:xfrm>
           <a:prstGeom prst="rect">
@@ -3232,8 +3232,8 @@
         </p:blipFill>
         <p:spPr>
           <a:xfrm>
-            <a:off x="27158996" y="16247650"/>
-            <a:ext cx="203200" cy="292915"/>
+            <a:off x="27137090" y="14757813"/>
+            <a:ext cx="203200" cy="292913"/>
           </a:xfrm>
           <a:prstGeom prst="rect">
             <a:avLst/>
@@ -3256,8 +3256,8 @@
         </p:blipFill>
         <p:spPr>
           <a:xfrm>
-            <a:off x="22730947" y="16145470"/>
-            <a:ext cx="203200" cy="1804435"/>
+            <a:off x="22709040" y="14605390"/>
+            <a:ext cx="203200" cy="1702252"/>
           </a:xfrm>
           <a:prstGeom prst="rect">
             <a:avLst/>
@@ -3280,8 +3280,8 @@
         </p:blipFill>
         <p:spPr>
           <a:xfrm>
-            <a:off x="27158996" y="17548987"/>
-            <a:ext cx="203200" cy="400918"/>
+            <a:off x="27137090" y="15906726"/>
+            <a:ext cx="203200" cy="400916"/>
           </a:xfrm>
           <a:prstGeom prst="rect">
             <a:avLst/>
@@ -3304,7 +3304,7 @@
         </p:blipFill>
         <p:spPr>
           <a:xfrm>
-            <a:off x="24661293" y="18753452"/>
+            <a:off x="24639385" y="17111191"/>
             <a:ext cx="500267" cy="203200"/>
           </a:xfrm>
           <a:prstGeom prst="rect">
@@ -3328,8 +3328,8 @@
         </p:blipFill>
         <p:spPr>
           <a:xfrm>
-            <a:off x="20813185" y="34268891"/>
-            <a:ext cx="8423045" cy="1833909"/>
+            <a:off x="20813185" y="32634166"/>
+            <a:ext cx="8423045" cy="1049442"/>
           </a:xfrm>
           <a:prstGeom prst="rect">
             <a:avLst/>
@@ -3352,7 +3352,7 @@
         </p:blipFill>
         <p:spPr>
           <a:xfrm>
-            <a:off x="23289409" y="35084246"/>
+            <a:off x="23289409" y="33057287"/>
             <a:ext cx="248270" cy="203200"/>
           </a:xfrm>
           <a:prstGeom prst="rect">
@@ -3376,7 +3376,7 @@
         </p:blipFill>
         <p:spPr>
           <a:xfrm>
-            <a:off x="26241449" y="35084246"/>
+            <a:off x="26241449" y="33057287"/>
             <a:ext cx="248270" cy="203200"/>
           </a:xfrm>
           <a:prstGeom prst="rect">
@@ -3400,7 +3400,7 @@
         </p:blipFill>
         <p:spPr>
           <a:xfrm>
-            <a:off x="12008463" y="39765048"/>
+            <a:off x="850851" y="38880160"/>
             <a:ext cx="3526990" cy="723152"/>
           </a:xfrm>
           <a:prstGeom prst="rect">
@@ -3424,7 +3424,7 @@
         </p:blipFill>
         <p:spPr>
           <a:xfrm>
-            <a:off x="15653156" y="39766924"/>
+            <a:off x="4495544" y="38882035"/>
             <a:ext cx="4679004" cy="719401"/>
           </a:xfrm>
           <a:prstGeom prst="rect">
@@ -3483,7 +3483,7 @@
         </p:nvSpPr>
         <p:spPr>
           <a:xfrm>
-            <a:off x="573287" y="10202071"/>
+            <a:off x="573287" y="8712219"/>
             <a:ext cx="9295048" cy="71999"/>
           </a:xfrm>
           <a:prstGeom prst="rect">
@@ -3526,7 +3526,7 @@
         </p:nvSpPr>
         <p:spPr>
           <a:xfrm>
-            <a:off x="573287" y="23891373"/>
+            <a:off x="573287" y="22469824"/>
             <a:ext cx="9295048" cy="71999"/>
           </a:xfrm>
           <a:prstGeom prst="rect">
@@ -3569,7 +3569,7 @@
         </p:nvSpPr>
         <p:spPr>
           <a:xfrm>
-            <a:off x="10475281" y="10101104"/>
+            <a:off x="10475281" y="8611252"/>
             <a:ext cx="9295048" cy="71999"/>
           </a:xfrm>
           <a:prstGeom prst="rect">
@@ -3612,7 +3612,7 @@
         </p:nvSpPr>
         <p:spPr>
           <a:xfrm>
-            <a:off x="10475281" y="12598828"/>
+            <a:off x="10475281" y="11108976"/>
             <a:ext cx="9295048" cy="71999"/>
           </a:xfrm>
           <a:prstGeom prst="rect">
@@ -3655,7 +3655,7 @@
         </p:nvSpPr>
         <p:spPr>
           <a:xfrm>
-            <a:off x="10475281" y="18279099"/>
+            <a:off x="10475281" y="15969502"/>
             <a:ext cx="9295048" cy="71999"/>
           </a:xfrm>
           <a:prstGeom prst="rect">
@@ -3698,7 +3698,7 @@
         </p:nvSpPr>
         <p:spPr>
           <a:xfrm>
-            <a:off x="10475281" y="31979329"/>
+            <a:off x="10475281" y="30428683"/>
             <a:ext cx="9295048" cy="71999"/>
           </a:xfrm>
           <a:prstGeom prst="rect">
@@ -3741,7 +3741,7 @@
         </p:nvSpPr>
         <p:spPr>
           <a:xfrm>
-            <a:off x="20377274" y="10202071"/>
+            <a:off x="20377274" y="8712219"/>
             <a:ext cx="9295048" cy="71999"/>
           </a:xfrm>
           <a:prstGeom prst="rect">
@@ -3784,7 +3784,7 @@
         </p:nvSpPr>
         <p:spPr>
           <a:xfrm>
-            <a:off x="20377274" y="26197217"/>
+            <a:off x="20377274" y="24551189"/>
             <a:ext cx="9295048" cy="71999"/>
           </a:xfrm>
           <a:prstGeom prst="rect">
@@ -3827,7 +3827,7 @@
         </p:nvSpPr>
         <p:spPr>
           <a:xfrm>
-            <a:off x="20377274" y="33707689"/>
+            <a:off x="20377274" y="32072936"/>
             <a:ext cx="9295048" cy="71999"/>
           </a:xfrm>
           <a:prstGeom prst="rect">
@@ -3878,8 +3878,8 @@
         </p:blipFill>
         <p:spPr>
           <a:xfrm>
-            <a:off x="936003" y="11556755"/>
-            <a:ext cx="8570548" cy="10112606"/>
+            <a:off x="936003" y="9586118"/>
+            <a:ext cx="8570548" cy="10661707"/>
           </a:xfrm>
           <a:prstGeom prst="rect">
             <a:avLst/>
@@ -3902,8 +3902,8 @@
         </p:blipFill>
         <p:spPr>
           <a:xfrm>
-            <a:off x="936003" y="24537829"/>
-            <a:ext cx="8570548" cy="12354768"/>
+            <a:off x="936003" y="23116289"/>
+            <a:ext cx="8570548" cy="13361452"/>
           </a:xfrm>
           <a:prstGeom prst="rect">
             <a:avLst/>
@@ -3926,8 +3926,8 @@
         </p:blipFill>
         <p:spPr>
           <a:xfrm>
-            <a:off x="10837862" y="18925641"/>
-            <a:ext cx="8570549" cy="7412862"/>
+            <a:off x="10837862" y="16616064"/>
+            <a:ext cx="8570549" cy="8511061"/>
           </a:xfrm>
           <a:prstGeom prst="rect">
             <a:avLst/>
@@ -3950,7 +3950,7 @@
         </p:blipFill>
         <p:spPr>
           <a:xfrm>
-            <a:off x="10837862" y="34283696"/>
+            <a:off x="10837862" y="32733074"/>
             <a:ext cx="8570549" cy="2516711"/>
           </a:xfrm>
           <a:prstGeom prst="rect">
@@ -3960,7 +3960,7 @@
       </p:pic>
       <p:pic>
         <p:nvPicPr>
-          <p:cNvPr id="30" name="Picture 29" descr="fig_v2_uncertified_00dbd492_poster.png"/>
+          <p:cNvPr id="30" name="Picture 29" descr="fig_v2_uncertified_00dbd492_large.png"/>
           <p:cNvPicPr>
             <a:picLocks noChangeAspect="1"/>
           </p:cNvPicPr>
@@ -3974,8 +3974,8 @@
         </p:blipFill>
         <p:spPr>
           <a:xfrm>
-            <a:off x="20739735" y="27172130"/>
-            <a:ext cx="8570549" cy="3843706"/>
+            <a:off x="20739748" y="25530452"/>
+            <a:ext cx="8570549" cy="4255530"/>
           </a:xfrm>
           <a:prstGeom prst="rect">
             <a:avLst/>
@@ -4438,8 +4438,8 @@
         </p:nvSpPr>
         <p:spPr>
           <a:xfrm>
-            <a:off x="1564767" y="6595817"/>
-            <a:ext cx="27197172" cy="360595"/>
+            <a:off x="7417359" y="6595817"/>
+            <a:ext cx="15492240" cy="360595"/>
           </a:xfrm>
           <a:prstGeom prst="rect">
             <a:avLst/>
@@ -4459,7 +4459,7 @@
                 </a:solidFill>
                 <a:latin typeface="Arial"/>
               </a:rPr>
-              <a:t>When an explanation is inadequate, how can a reasoner discover what is missing, choose what to revise, and test whether the revision helps?</a:t>
+              <a:t>Find what is missing, choose a revision, test it.</a:t>
             </a:r>
             <a:r>
               <a:rPr sz="2840" b="0" i="0">
@@ -4477,7 +4477,7 @@
                 </a:solidFill>
                 <a:latin typeface="Arial"/>
               </a:rPr>
-              <a:t>ARC-AGI-2 is the controlled</a:t>
+              <a:t>A question shaped in discussions with Toni Kazic.</a:t>
             </a:r>
           </a:p>
         </p:txBody>
@@ -4490,8 +4490,8 @@
         </p:nvSpPr>
         <p:spPr>
           <a:xfrm>
-            <a:off x="10477894" y="7063965"/>
-            <a:ext cx="9371121" cy="360595"/>
+            <a:off x="936003" y="7846626"/>
+            <a:ext cx="5536049" cy="544059"/>
           </a:xfrm>
           <a:prstGeom prst="rect">
             <a:avLst/>
@@ -4505,31 +4505,49 @@
           <a:lstStyle/>
           <a:p>
             <a:r>
-              <a:rPr sz="2840" b="0" i="0">
-                <a:solidFill>
-                  <a:srgbClr val="52514E"/>
-                </a:solidFill>
-                <a:latin typeface="Arial"/>
-              </a:rPr>
-              <a:t>testbed.</a:t>
-            </a:r>
-            <a:r>
-              <a:rPr sz="2840" b="0" i="0">
-                <a:solidFill>
-                  <a:srgbClr val="52514E"/>
+              <a:rPr sz="3790" b="1" i="0">
+                <a:solidFill>
+                  <a:srgbClr val="2A78D6"/>
+                </a:solidFill>
+                <a:latin typeface="Arial"/>
+              </a:rPr>
+              <a:t>1</a:t>
+            </a:r>
+            <a:r>
+              <a:rPr sz="4280" b="0" i="1">
+                <a:solidFill>
+                  <a:srgbClr val="2A78D6"/>
                 </a:solidFill>
                 <a:latin typeface="Arial"/>
               </a:rPr>
               <a:t> </a:t>
             </a:r>
             <a:r>
-              <a:rPr sz="2840" b="0" i="0">
-                <a:solidFill>
-                  <a:srgbClr val="52514E"/>
-                </a:solidFill>
-                <a:latin typeface="Arial"/>
-              </a:rPr>
-              <a:t>A question shaped in discussions with Toni Kazic.</a:t>
+              <a:rPr sz="4280" b="0" i="1">
+                <a:solidFill>
+                  <a:srgbClr val="2A78D6"/>
+                </a:solidFill>
+                <a:latin typeface="Arial"/>
+              </a:rPr>
+              <a:t>·</a:t>
+            </a:r>
+            <a:r>
+              <a:rPr sz="3790" b="1" i="0">
+                <a:solidFill>
+                  <a:srgbClr val="2A78D6"/>
+                </a:solidFill>
+                <a:latin typeface="Arial"/>
+              </a:rPr>
+              <a:t> </a:t>
+            </a:r>
+            <a:r>
+              <a:rPr sz="3790" b="1" i="0">
+                <a:solidFill>
+                  <a:srgbClr val="2A78D6"/>
+                </a:solidFill>
+                <a:latin typeface="Arial"/>
+              </a:rPr>
+              <a:t>Why reasoning fails</a:t>
             </a:r>
           </a:p>
         </p:txBody>
@@ -4542,8 +4560,8 @@
         </p:nvSpPr>
         <p:spPr>
           <a:xfrm>
-            <a:off x="1237056" y="7599237"/>
-            <a:ext cx="27852693" cy="383495"/>
+            <a:off x="936003" y="9093516"/>
+            <a:ext cx="8172150" cy="360595"/>
           </a:xfrm>
           <a:prstGeom prst="rect">
             <a:avLst/>
@@ -4557,130 +4575,13 @@
           <a:lstStyle/>
           <a:p>
             <a:r>
-              <a:rPr sz="2840" b="1" i="0">
+              <a:rPr sz="2840" b="0" i="0">
                 <a:solidFill>
                   <a:srgbClr val="0B0B0B"/>
                 </a:solidFill>
                 <a:latin typeface="Arial"/>
               </a:rPr>
-              <a:t>Aims</a:t>
-            </a:r>
-            <a:r>
-              <a:rPr sz="2840" b="0" i="0">
-                <a:solidFill>
-                  <a:srgbClr val="0B0B0B"/>
-                </a:solidFill>
-                <a:latin typeface="Arial"/>
-              </a:rPr>
-              <a:t>, not yet all achieved:</a:t>
-            </a:r>
-            <a:r>
-              <a:rPr sz="2840" b="0" i="0">
-                <a:solidFill>
-                  <a:srgbClr val="0B0B0B"/>
-                </a:solidFill>
-                <a:latin typeface="Arial"/>
-              </a:rPr>
-              <a:t> </a:t>
-            </a:r>
-            <a:r>
-              <a:rPr sz="2840" b="0" i="0">
-                <a:solidFill>
-                  <a:srgbClr val="0B0B0B"/>
-                </a:solidFill>
-                <a:latin typeface="Arial"/>
-              </a:rPr>
-              <a:t>find objects and relations</a:t>
-            </a:r>
-            <a:r>
-              <a:rPr sz="2970" b="0" i="1">
-                <a:solidFill>
-                  <a:srgbClr val="0B0B0B"/>
-                </a:solidFill>
-                <a:latin typeface="Arial"/>
-              </a:rPr>
-              <a:t> →</a:t>
-            </a:r>
-            <a:r>
-              <a:rPr sz="2840" b="0" i="0">
-                <a:solidFill>
-                  <a:srgbClr val="0B0B0B"/>
-                </a:solidFill>
-                <a:latin typeface="Arial"/>
-              </a:rPr>
-              <a:t>write executable hypotheses</a:t>
-            </a:r>
-            <a:r>
-              <a:rPr sz="2970" b="0" i="1">
-                <a:solidFill>
-                  <a:srgbClr val="0B0B0B"/>
-                </a:solidFill>
-                <a:latin typeface="Arial"/>
-              </a:rPr>
-              <a:t> →</a:t>
-            </a:r>
-            <a:r>
-              <a:rPr sz="2840" b="0" i="0">
-                <a:solidFill>
-                  <a:srgbClr val="0B0B0B"/>
-                </a:solidFill>
-                <a:latin typeface="Arial"/>
-              </a:rPr>
-              <a:t>notice inadequacy</a:t>
-            </a:r>
-            <a:r>
-              <a:rPr sz="2970" b="0" i="1">
-                <a:solidFill>
-                  <a:srgbClr val="0B0B0B"/>
-                </a:solidFill>
-                <a:latin typeface="Arial"/>
-              </a:rPr>
-              <a:t> →</a:t>
-            </a:r>
-            <a:r>
-              <a:rPr sz="2840" b="0" i="0">
-                <a:solidFill>
-                  <a:srgbClr val="0B0B0B"/>
-                </a:solidFill>
-                <a:latin typeface="Arial"/>
-              </a:rPr>
-              <a:t>choose a justified revision</a:t>
-            </a:r>
-            <a:r>
-              <a:rPr sz="2970" b="0" i="1">
-                <a:solidFill>
-                  <a:srgbClr val="0B0B0B"/>
-                </a:solidFill>
-                <a:latin typeface="Arial"/>
-              </a:rPr>
-              <a:t> →</a:t>
-            </a:r>
-            <a:r>
-              <a:rPr sz="2840" b="0" i="0">
-                <a:solidFill>
-                  <a:srgbClr val="0B0B0B"/>
-                </a:solidFill>
-                <a:latin typeface="Arial"/>
-              </a:rPr>
-              <a:t>test it independently</a:t>
-            </a:r>
-            <a:r>
-              <a:rPr sz="2970" b="0" i="1">
-                <a:solidFill>
-                  <a:srgbClr val="0B0B0B"/>
-                </a:solidFill>
-                <a:latin typeface="Arial"/>
-              </a:rPr>
-              <a:t> →</a:t>
-            </a:r>
-            <a:r>
-              <a:rPr sz="2840" b="0" i="0">
-                <a:solidFill>
-                  <a:srgbClr val="0B0B0B"/>
-                </a:solidFill>
-                <a:latin typeface="Arial"/>
-              </a:rPr>
-              <a:t>transfer the</a:t>
+              <a:t>One rule must fit both examples and the new input.</a:t>
             </a:r>
           </a:p>
         </p:txBody>
@@ -4693,8 +4594,8 @@
         </p:nvSpPr>
         <p:spPr>
           <a:xfrm>
-            <a:off x="14278889" y="8089986"/>
-            <a:ext cx="1769039" cy="360595"/>
+            <a:off x="936003" y="20412149"/>
+            <a:ext cx="6817095" cy="312515"/>
           </a:xfrm>
           <a:prstGeom prst="rect">
             <a:avLst/>
@@ -4708,13 +4609,31 @@
           <a:lstStyle/>
           <a:p>
             <a:r>
-              <a:rPr sz="2840" b="0" i="0">
-                <a:solidFill>
-                  <a:srgbClr val="0B0B0B"/>
-                </a:solidFill>
-                <a:latin typeface="Arial"/>
-              </a:rPr>
-              <a:t>procedure.</a:t>
+              <a:rPr sz="2460" b="0" i="0">
+                <a:solidFill>
+                  <a:srgbClr val="52514E"/>
+                </a:solidFill>
+                <a:latin typeface="Arial"/>
+              </a:rPr>
+              <a:t>Rule:</a:t>
+            </a:r>
+            <a:r>
+              <a:rPr sz="2460" b="0" i="0">
+                <a:solidFill>
+                  <a:srgbClr val="52514E"/>
+                </a:solidFill>
+                <a:latin typeface="Arial"/>
+              </a:rPr>
+              <a:t> </a:t>
+            </a:r>
+            <a:r>
+              <a:rPr sz="2460" b="0" i="0">
+                <a:solidFill>
+                  <a:srgbClr val="52514E"/>
+                </a:solidFill>
+                <a:latin typeface="Arial"/>
+              </a:rPr>
+              <a:t>each frame’s fill colour depends on its size.</a:t>
             </a:r>
           </a:p>
         </p:txBody>
@@ -4727,8 +4646,8 @@
         </p:nvSpPr>
         <p:spPr>
           <a:xfrm>
-            <a:off x="936003" y="9336461"/>
-            <a:ext cx="5536049" cy="544059"/>
+            <a:off x="936003" y="21674073"/>
+            <a:ext cx="7248786" cy="480795"/>
           </a:xfrm>
           <a:prstGeom prst="rect">
             <a:avLst/>
@@ -4748,43 +4667,7 @@
                 </a:solidFill>
                 <a:latin typeface="Arial"/>
               </a:rPr>
-              <a:t>1</a:t>
-            </a:r>
-            <a:r>
-              <a:rPr sz="4280" b="0" i="1">
-                <a:solidFill>
-                  <a:srgbClr val="2A78D6"/>
-                </a:solidFill>
-                <a:latin typeface="Arial"/>
-              </a:rPr>
-              <a:t> </a:t>
-            </a:r>
-            <a:r>
-              <a:rPr sz="4280" b="0" i="1">
-                <a:solidFill>
-                  <a:srgbClr val="2A78D6"/>
-                </a:solidFill>
-                <a:latin typeface="Arial"/>
-              </a:rPr>
-              <a:t>·</a:t>
-            </a:r>
-            <a:r>
-              <a:rPr sz="3790" b="1" i="0">
-                <a:solidFill>
-                  <a:srgbClr val="2A78D6"/>
-                </a:solidFill>
-                <a:latin typeface="Arial"/>
-              </a:rPr>
-              <a:t> </a:t>
-            </a:r>
-            <a:r>
-              <a:rPr sz="3790" b="1" i="0">
-                <a:solidFill>
-                  <a:srgbClr val="2A78D6"/>
-                </a:solidFill>
-                <a:latin typeface="Arial"/>
-              </a:rPr>
-              <a:t>Why reasoning fails</a:t>
+              <a:t>Three ways an explanation fails</a:t>
             </a:r>
           </a:p>
         </p:txBody>
@@ -4797,8 +4680,8 @@
         </p:nvSpPr>
         <p:spPr>
           <a:xfrm>
-            <a:off x="936003" y="10583338"/>
-            <a:ext cx="8398244" cy="360595"/>
+            <a:off x="936003" y="36807508"/>
+            <a:ext cx="6949008" cy="360595"/>
           </a:xfrm>
           <a:prstGeom prst="rect">
             <a:avLst/>
@@ -4818,7 +4701,7 @@
                 </a:solidFill>
                 <a:latin typeface="Arial"/>
               </a:rPr>
-              <a:t>Find one rule that fits both examples, then apply it to</a:t>
+              <a:t>Telling these apart is the research problem.</a:t>
             </a:r>
           </a:p>
         </p:txBody>
@@ -4831,8 +4714,8 @@
         </p:nvSpPr>
         <p:spPr>
           <a:xfrm>
-            <a:off x="936003" y="11064133"/>
-            <a:ext cx="2288659" cy="360595"/>
+            <a:off x="10837862" y="7846626"/>
+            <a:ext cx="8002530" cy="544059"/>
           </a:xfrm>
           <a:prstGeom prst="rect">
             <a:avLst/>
@@ -4846,13 +4729,49 @@
           <a:lstStyle/>
           <a:p>
             <a:r>
-              <a:rPr sz="2840" b="0" i="0">
-                <a:solidFill>
-                  <a:srgbClr val="0B0B0B"/>
-                </a:solidFill>
-                <a:latin typeface="Arial"/>
-              </a:rPr>
-              <a:t>the new input.</a:t>
+              <a:rPr sz="3790" b="1" i="0">
+                <a:solidFill>
+                  <a:srgbClr val="2A78D6"/>
+                </a:solidFill>
+                <a:latin typeface="Arial"/>
+              </a:rPr>
+              <a:t>2</a:t>
+            </a:r>
+            <a:r>
+              <a:rPr sz="4280" b="0" i="1">
+                <a:solidFill>
+                  <a:srgbClr val="2A78D6"/>
+                </a:solidFill>
+                <a:latin typeface="Arial"/>
+              </a:rPr>
+              <a:t> </a:t>
+            </a:r>
+            <a:r>
+              <a:rPr sz="4280" b="0" i="1">
+                <a:solidFill>
+                  <a:srgbClr val="2A78D6"/>
+                </a:solidFill>
+                <a:latin typeface="Arial"/>
+              </a:rPr>
+              <a:t>·</a:t>
+            </a:r>
+            <a:r>
+              <a:rPr sz="3790" b="1" i="0">
+                <a:solidFill>
+                  <a:srgbClr val="2A78D6"/>
+                </a:solidFill>
+                <a:latin typeface="Arial"/>
+              </a:rPr>
+              <a:t> </a:t>
+            </a:r>
+            <a:r>
+              <a:rPr sz="3790" b="1" i="0">
+                <a:solidFill>
+                  <a:srgbClr val="2A78D6"/>
+                </a:solidFill>
+                <a:latin typeface="Arial"/>
+              </a:rPr>
+              <a:t>What CORA has demonstrated</a:t>
             </a:r>
           </a:p>
         </p:txBody>
@@ -4865,8 +4784,8 @@
         </p:nvSpPr>
         <p:spPr>
           <a:xfrm>
-            <a:off x="936003" y="21833685"/>
-            <a:ext cx="8037785" cy="312515"/>
+            <a:off x="10837862" y="8992548"/>
+            <a:ext cx="5218501" cy="360595"/>
           </a:xfrm>
           <a:prstGeom prst="rect">
             <a:avLst/>
@@ -4880,31 +4799,13 @@
           <a:lstStyle/>
           <a:p>
             <a:r>
-              <a:rPr sz="2460" b="0" i="0">
-                <a:solidFill>
-                  <a:srgbClr val="52514E"/>
-                </a:solidFill>
-                <a:latin typeface="Arial"/>
-              </a:rPr>
-              <a:t>The rule here:</a:t>
-            </a:r>
-            <a:r>
-              <a:rPr sz="2460" b="0" i="0">
-                <a:solidFill>
-                  <a:srgbClr val="52514E"/>
-                </a:solidFill>
-                <a:latin typeface="Arial"/>
-              </a:rPr>
-              <a:t> </a:t>
-            </a:r>
-            <a:r>
-              <a:rPr sz="2460" b="0" i="0">
-                <a:solidFill>
-                  <a:srgbClr val="52514E"/>
-                </a:solidFill>
-                <a:latin typeface="Arial"/>
-              </a:rPr>
-              <a:t>each frame’s fill colour depends on its size.</a:t>
+              <a:rPr sz="2840" b="0" i="0">
+                <a:solidFill>
+                  <a:srgbClr val="0B0B0B"/>
+                </a:solidFill>
+                <a:latin typeface="Arial"/>
+              </a:rPr>
+              <a:t>CORA writes rules as programs.</a:t>
             </a:r>
           </a:p>
         </p:txBody>
@@ -4917,8 +4818,8 @@
         </p:nvSpPr>
         <p:spPr>
           <a:xfrm>
-            <a:off x="936003" y="23095610"/>
-            <a:ext cx="7248786" cy="480795"/>
+            <a:off x="10837862" y="10305923"/>
+            <a:ext cx="5968431" cy="480795"/>
           </a:xfrm>
           <a:prstGeom prst="rect">
             <a:avLst/>
@@ -4938,7 +4839,16 @@
                 </a:solidFill>
                 <a:latin typeface="Arial"/>
               </a:rPr>
-              <a:t>Three ways an explanation fails</a:t>
+              <a:t>Fitting is not enough</a:t>
+            </a:r>
+            <a:r>
+              <a:rPr sz="2460" b="1" i="0">
+                <a:solidFill>
+                  <a:srgbClr val="0CA30C"/>
+                </a:solidFill>
+                <a:latin typeface="Arial"/>
+              </a:rPr>
+              <a:t> [DONE]</a:t>
             </a:r>
           </a:p>
         </p:txBody>
@@ -4951,8 +4861,8 @@
         </p:nvSpPr>
         <p:spPr>
           <a:xfrm>
-            <a:off x="936003" y="37222351"/>
-            <a:ext cx="7987886" cy="360595"/>
+            <a:off x="12321070" y="11534914"/>
+            <a:ext cx="852767" cy="1442385"/>
           </a:xfrm>
           <a:prstGeom prst="rect">
             <a:avLst/>
@@ -4966,13 +4876,13 @@
           <a:lstStyle/>
           <a:p>
             <a:r>
-              <a:rPr sz="2840" b="0" i="0">
-                <a:solidFill>
-                  <a:srgbClr val="0B0B0B"/>
-                </a:solidFill>
-                <a:latin typeface="Arial"/>
-              </a:rPr>
-              <a:t>Telling these apart from the examples alone is the</a:t>
+              <a:rPr sz="11360" b="1" i="0">
+                <a:solidFill>
+                  <a:srgbClr val="0CA30C"/>
+                </a:solidFill>
+                <a:latin typeface="Arial"/>
+              </a:rPr>
+              <a:t>6</a:t>
             </a:r>
           </a:p>
         </p:txBody>
@@ -4985,8 +4895,8 @@
         </p:nvSpPr>
         <p:spPr>
           <a:xfrm>
-            <a:off x="936003" y="37703146"/>
-            <a:ext cx="2949272" cy="360595"/>
+            <a:off x="11940286" y="12901293"/>
+            <a:ext cx="1614344" cy="360596"/>
           </a:xfrm>
           <a:prstGeom prst="rect">
             <a:avLst/>
@@ -5002,11 +4912,11 @@
             <a:r>
               <a:rPr sz="2840" b="0" i="0">
                 <a:solidFill>
-                  <a:srgbClr val="0B0B0B"/>
-                </a:solidFill>
-                <a:latin typeface="Arial"/>
-              </a:rPr>
-              <a:t>research problem.</a:t>
+                  <a:srgbClr val="0CA30C"/>
+                </a:solidFill>
+                <a:latin typeface="Arial"/>
+              </a:rPr>
+              <a:t>accepted,</a:t>
             </a:r>
           </a:p>
         </p:txBody>
@@ -5019,8 +4929,8 @@
         </p:nvSpPr>
         <p:spPr>
           <a:xfrm>
-            <a:off x="10837862" y="9336461"/>
-            <a:ext cx="8002530" cy="544059"/>
+            <a:off x="11930672" y="13382088"/>
+            <a:ext cx="1633456" cy="360596"/>
           </a:xfrm>
           <a:prstGeom prst="rect">
             <a:avLst/>
@@ -5034,49 +4944,31 @@
           <a:lstStyle/>
           <a:p>
             <a:r>
-              <a:rPr sz="3790" b="1" i="0">
-                <a:solidFill>
-                  <a:srgbClr val="2A78D6"/>
-                </a:solidFill>
-                <a:latin typeface="Arial"/>
-              </a:rPr>
-              <a:t>2</a:t>
-            </a:r>
-            <a:r>
-              <a:rPr sz="4280" b="0" i="1">
-                <a:solidFill>
-                  <a:srgbClr val="2A78D6"/>
+              <a:rPr sz="2840" b="0" i="0">
+                <a:solidFill>
+                  <a:srgbClr val="0CA30C"/>
+                </a:solidFill>
+                <a:latin typeface="Arial"/>
+              </a:rPr>
+              <a:t>all</a:t>
+            </a:r>
+            <a:r>
+              <a:rPr sz="2840" b="0" i="0">
+                <a:solidFill>
+                  <a:srgbClr val="0CA30C"/>
                 </a:solidFill>
                 <a:latin typeface="Arial"/>
               </a:rPr>
               <a:t> </a:t>
             </a:r>
             <a:r>
-              <a:rPr sz="4280" b="0" i="1">
-                <a:solidFill>
-                  <a:srgbClr val="2A78D6"/>
-                </a:solidFill>
-                <a:latin typeface="Arial"/>
-              </a:rPr>
-              <a:t>·</a:t>
-            </a:r>
-            <a:r>
-              <a:rPr sz="3790" b="1" i="0">
-                <a:solidFill>
-                  <a:srgbClr val="2A78D6"/>
-                </a:solidFill>
-                <a:latin typeface="Arial"/>
-              </a:rPr>
-              <a:t> </a:t>
-            </a:r>
-            <a:r>
-              <a:rPr sz="3790" b="1" i="0">
-                <a:solidFill>
-                  <a:srgbClr val="2A78D6"/>
-                </a:solidFill>
-                <a:latin typeface="Arial"/>
-              </a:rPr>
-              <a:t>What CORA has demonstrated</a:t>
+              <a:rPr sz="2840" b="0" i="0">
+                <a:solidFill>
+                  <a:srgbClr val="0CA30C"/>
+                </a:solidFill>
+                <a:latin typeface="Arial"/>
+              </a:rPr>
+              <a:t>correct</a:t>
             </a:r>
           </a:p>
         </p:txBody>
@@ -5089,8 +4981,8 @@
         </p:nvSpPr>
         <p:spPr>
           <a:xfrm>
-            <a:off x="10837862" y="10482374"/>
-            <a:ext cx="8042687" cy="360595"/>
+            <a:off x="15952088" y="11534914"/>
+            <a:ext cx="1654733" cy="1442385"/>
           </a:xfrm>
           <a:prstGeom prst="rect">
             <a:avLst/>
@@ -5104,13 +4996,13 @@
           <a:lstStyle/>
           <a:p>
             <a:r>
-              <a:rPr sz="2840" b="0" i="0">
-                <a:solidFill>
-                  <a:srgbClr val="0B0B0B"/>
-                </a:solidFill>
-                <a:latin typeface="Arial"/>
-              </a:rPr>
-              <a:t>CORA writes rules as programs and checks them.</a:t>
+              <a:rPr sz="11360" b="1" i="0">
+                <a:solidFill>
+                  <a:srgbClr val="D03B3B"/>
+                </a:solidFill>
+                <a:latin typeface="Arial"/>
+              </a:rPr>
+              <a:t>26</a:t>
             </a:r>
           </a:p>
         </p:txBody>
@@ -5123,8 +5015,8 @@
         </p:nvSpPr>
         <p:spPr>
           <a:xfrm>
-            <a:off x="10837862" y="11795758"/>
-            <a:ext cx="5968431" cy="480795"/>
+            <a:off x="15756647" y="12901293"/>
+            <a:ext cx="2045613" cy="360596"/>
           </a:xfrm>
           <a:prstGeom prst="rect">
             <a:avLst/>
@@ -5138,22 +5030,31 @@
           <a:lstStyle/>
           <a:p>
             <a:r>
-              <a:rPr sz="3790" b="1" i="0">
-                <a:solidFill>
-                  <a:srgbClr val="2A78D6"/>
-                </a:solidFill>
-                <a:latin typeface="Arial"/>
-              </a:rPr>
-              <a:t>Fitting is not enough</a:t>
-            </a:r>
-            <a:r>
-              <a:rPr sz="2460" b="1" i="0">
-                <a:solidFill>
-                  <a:srgbClr val="0CA30C"/>
-                </a:solidFill>
-                <a:latin typeface="Arial"/>
-              </a:rPr>
-              <a:t> [DONE]</a:t>
+              <a:rPr sz="2840" b="0" i="0">
+                <a:solidFill>
+                  <a:srgbClr val="D03B3B"/>
+                </a:solidFill>
+                <a:latin typeface="Arial"/>
+              </a:rPr>
+              <a:t>tasks:</a:t>
+            </a:r>
+            <a:r>
+              <a:rPr sz="2840" b="0" i="0">
+                <a:solidFill>
+                  <a:srgbClr val="D03B3B"/>
+                </a:solidFill>
+                <a:latin typeface="Arial"/>
+              </a:rPr>
+              <a:t> </a:t>
+            </a:r>
+            <a:r>
+              <a:rPr sz="2840" b="0" i="0">
+                <a:solidFill>
+                  <a:srgbClr val="D03B3B"/>
+                </a:solidFill>
+                <a:latin typeface="Arial"/>
+              </a:rPr>
+              <a:t>every</a:t>
             </a:r>
           </a:p>
         </p:txBody>
@@ -5166,8 +5067,8 @@
         </p:nvSpPr>
         <p:spPr>
           <a:xfrm>
-            <a:off x="12321070" y="13024749"/>
-            <a:ext cx="852767" cy="1442386"/>
+            <a:off x="15514229" y="13382088"/>
+            <a:ext cx="2530617" cy="360596"/>
           </a:xfrm>
           <a:prstGeom prst="rect">
             <a:avLst/>
@@ -5181,13 +5082,49 @@
           <a:lstStyle/>
           <a:p>
             <a:r>
-              <a:rPr sz="11360" b="1" i="0">
-                <a:solidFill>
-                  <a:srgbClr val="0CA30C"/>
-                </a:solidFill>
-                <a:latin typeface="Arial"/>
-              </a:rPr>
-              <a:t>6</a:t>
+              <a:rPr sz="2840" b="0" i="0">
+                <a:solidFill>
+                  <a:srgbClr val="D03B3B"/>
+                </a:solidFill>
+                <a:latin typeface="Arial"/>
+              </a:rPr>
+              <a:t>fitted</a:t>
+            </a:r>
+            <a:r>
+              <a:rPr sz="2840" b="0" i="0">
+                <a:solidFill>
+                  <a:srgbClr val="D03B3B"/>
+                </a:solidFill>
+                <a:latin typeface="Arial"/>
+              </a:rPr>
+              <a:t> </a:t>
+            </a:r>
+            <a:r>
+              <a:rPr sz="2840" b="0" i="0">
+                <a:solidFill>
+                  <a:srgbClr val="D03B3B"/>
+                </a:solidFill>
+                <a:latin typeface="Arial"/>
+              </a:rPr>
+              <a:t>rule</a:t>
+            </a:r>
+            <a:r>
+              <a:rPr sz="2840" b="0" i="0">
+                <a:solidFill>
+                  <a:srgbClr val="D03B3B"/>
+                </a:solidFill>
+                <a:latin typeface="Arial"/>
+              </a:rPr>
+              <a:t> </a:t>
+            </a:r>
+            <a:r>
+              <a:rPr sz="2840" b="0" i="0">
+                <a:solidFill>
+                  <a:srgbClr val="D03B3B"/>
+                </a:solidFill>
+                <a:latin typeface="Arial"/>
+              </a:rPr>
+              <a:t>failed</a:t>
             </a:r>
           </a:p>
         </p:txBody>
@@ -5200,8 +5137,8 @@
         </p:nvSpPr>
         <p:spPr>
           <a:xfrm>
-            <a:off x="11216158" y="14391127"/>
-            <a:ext cx="3062499" cy="360596"/>
+            <a:off x="10837861" y="13948308"/>
+            <a:ext cx="3664119" cy="312515"/>
           </a:xfrm>
           <a:prstGeom prst="rect">
             <a:avLst/>
@@ -5215,31 +5152,13 @@
           <a:lstStyle/>
           <a:p>
             <a:r>
-              <a:rPr sz="2840" b="0" i="0">
-                <a:solidFill>
-                  <a:srgbClr val="0CA30C"/>
-                </a:solidFill>
-                <a:latin typeface="Arial"/>
-              </a:rPr>
-              <a:t>answers</a:t>
-            </a:r>
-            <a:r>
-              <a:rPr sz="2840" b="0" i="0">
-                <a:solidFill>
-                  <a:srgbClr val="0CA30C"/>
-                </a:solidFill>
-                <a:latin typeface="Arial"/>
-              </a:rPr>
-              <a:t> </a:t>
-            </a:r>
-            <a:r>
-              <a:rPr sz="2840" b="0" i="0">
-                <a:solidFill>
-                  <a:srgbClr val="0CA30C"/>
-                </a:solidFill>
-                <a:latin typeface="Arial"/>
-              </a:rPr>
-              <a:t>accepted,</a:t>
+              <a:rPr sz="2460" b="0" i="0">
+                <a:solidFill>
+                  <a:srgbClr val="52514E"/>
+                </a:solidFill>
+                <a:latin typeface="Arial"/>
+              </a:rPr>
+              <a:t>60 exposed training tasks.</a:t>
             </a:r>
           </a:p>
         </p:txBody>
@@ -5252,8 +5171,8 @@
         </p:nvSpPr>
         <p:spPr>
           <a:xfrm>
-            <a:off x="11930672" y="14871923"/>
-            <a:ext cx="1633456" cy="360596"/>
+            <a:off x="10837862" y="15213978"/>
+            <a:ext cx="6857131" cy="480795"/>
           </a:xfrm>
           <a:prstGeom prst="rect">
             <a:avLst/>
@@ -5267,31 +5186,22 @@
           <a:lstStyle/>
           <a:p>
             <a:r>
-              <a:rPr sz="2840" b="0" i="0">
+              <a:rPr sz="3790" b="1" i="0">
+                <a:solidFill>
+                  <a:srgbClr val="2A78D6"/>
+                </a:solidFill>
+                <a:latin typeface="Arial"/>
+              </a:rPr>
+              <a:t>A rule CORA built</a:t>
+            </a:r>
+            <a:r>
+              <a:rPr sz="2460" b="1" i="0">
                 <a:solidFill>
                   <a:srgbClr val="0CA30C"/>
                 </a:solidFill>
                 <a:latin typeface="Arial"/>
               </a:rPr>
-              <a:t>all</a:t>
-            </a:r>
-            <a:r>
-              <a:rPr sz="2840" b="0" i="0">
-                <a:solidFill>
-                  <a:srgbClr val="0CA30C"/>
-                </a:solidFill>
-                <a:latin typeface="Arial"/>
-              </a:rPr>
-              <a:t> </a:t>
-            </a:r>
-            <a:r>
-              <a:rPr sz="2840" b="0" i="0">
-                <a:solidFill>
-                  <a:srgbClr val="0CA30C"/>
-                </a:solidFill>
-                <a:latin typeface="Arial"/>
-              </a:rPr>
-              <a:t>correct</a:t>
+              <a:t> [DONE, NARROW]</a:t>
             </a:r>
           </a:p>
         </p:txBody>
@@ -5304,8 +5214,8 @@
         </p:nvSpPr>
         <p:spPr>
           <a:xfrm>
-            <a:off x="15952088" y="13024749"/>
-            <a:ext cx="1654733" cy="1442386"/>
+            <a:off x="10837862" y="25456894"/>
+            <a:ext cx="7741504" cy="360894"/>
           </a:xfrm>
           <a:prstGeom prst="rect">
             <a:avLst/>
@@ -5319,13 +5229,58 @@
           <a:lstStyle/>
           <a:p>
             <a:r>
-              <a:rPr sz="11360" b="1" i="0">
-                <a:solidFill>
-                  <a:srgbClr val="D03B3B"/>
-                </a:solidFill>
-                <a:latin typeface="Arial"/>
-              </a:rPr>
-              <a:t>26</a:t>
+              <a:rPr sz="2840" b="1" i="0">
+                <a:solidFill>
+                  <a:srgbClr val="0B0B0B"/>
+                </a:solidFill>
+                <a:latin typeface="Arial"/>
+              </a:rPr>
+              <a:t>Rule:</a:t>
+            </a:r>
+            <a:r>
+              <a:rPr sz="2840" b="1" i="0">
+                <a:solidFill>
+                  <a:srgbClr val="0074D9"/>
+                </a:solidFill>
+                <a:latin typeface="Arial"/>
+              </a:rPr>
+              <a:t> </a:t>
+            </a:r>
+            <a:r>
+              <a:rPr sz="2840" b="1" i="0">
+                <a:solidFill>
+                  <a:srgbClr val="0074D9"/>
+                </a:solidFill>
+                <a:latin typeface="Arial"/>
+              </a:rPr>
+              <a:t>blue</a:t>
+            </a:r>
+            <a:r>
+              <a:rPr sz="2840" b="0" i="0">
+                <a:solidFill>
+                  <a:srgbClr val="0B0B0B"/>
+                </a:solidFill>
+                <a:latin typeface="Arial"/>
+              </a:rPr>
+              <a:t> objects send a line up-left;</a:t>
+            </a:r>
+            <a:r>
+              <a:rPr sz="2840" b="1" i="0">
+                <a:solidFill>
+                  <a:srgbClr val="FF4136"/>
+                </a:solidFill>
+                <a:latin typeface="Arial"/>
+              </a:rPr>
+              <a:t> red</a:t>
+            </a:r>
+            <a:r>
+              <a:rPr sz="2840" b="0" i="0">
+                <a:solidFill>
+                  <a:srgbClr val="0B0B0B"/>
+                </a:solidFill>
+                <a:latin typeface="Arial"/>
+              </a:rPr>
+              <a:t> ones,</a:t>
             </a:r>
           </a:p>
         </p:txBody>
@@ -5338,8 +5293,8 @@
         </p:nvSpPr>
         <p:spPr>
           <a:xfrm>
-            <a:off x="14922436" y="14391127"/>
-            <a:ext cx="3714091" cy="360596"/>
+            <a:off x="10837861" y="25937691"/>
+            <a:ext cx="1834310" cy="360595"/>
           </a:xfrm>
           <a:prstGeom prst="rect">
             <a:avLst/>
@@ -5355,65 +5310,11 @@
             <a:r>
               <a:rPr sz="2840" b="0" i="0">
                 <a:solidFill>
-                  <a:srgbClr val="D03B3B"/>
-                </a:solidFill>
-                <a:latin typeface="Arial"/>
-              </a:rPr>
-              <a:t>tasks</a:t>
-            </a:r>
-            <a:r>
-              <a:rPr sz="2840" b="0" i="0">
-                <a:solidFill>
-                  <a:srgbClr val="D03B3B"/>
-                </a:solidFill>
-                <a:latin typeface="Arial"/>
-              </a:rPr>
-              <a:t> </a:t>
-            </a:r>
-            <a:r>
-              <a:rPr sz="2840" b="0" i="0">
-                <a:solidFill>
-                  <a:srgbClr val="D03B3B"/>
-                </a:solidFill>
-                <a:latin typeface="Arial"/>
-              </a:rPr>
-              <a:t>where</a:t>
-            </a:r>
-            <a:r>
-              <a:rPr sz="2840" b="0" i="0">
-                <a:solidFill>
-                  <a:srgbClr val="D03B3B"/>
-                </a:solidFill>
-                <a:latin typeface="Arial"/>
-              </a:rPr>
-              <a:t> </a:t>
-            </a:r>
-            <a:r>
-              <a:rPr sz="2840" b="0" i="0">
-                <a:solidFill>
-                  <a:srgbClr val="D03B3B"/>
-                </a:solidFill>
-                <a:latin typeface="Arial"/>
-              </a:rPr>
-              <a:t>every</a:t>
-            </a:r>
-            <a:r>
-              <a:rPr sz="2840" b="0" i="0">
-                <a:solidFill>
-                  <a:srgbClr val="D03B3B"/>
-                </a:solidFill>
-                <a:latin typeface="Arial"/>
-              </a:rPr>
-              <a:t> </a:t>
-            </a:r>
-            <a:r>
-              <a:rPr sz="2840" b="0" i="0">
-                <a:solidFill>
-                  <a:srgbClr val="D03B3B"/>
-                </a:solidFill>
-                <a:latin typeface="Arial"/>
-              </a:rPr>
-              <a:t>rule</a:t>
+                  <a:srgbClr val="0B0B0B"/>
+                </a:solidFill>
+                <a:latin typeface="Arial"/>
+              </a:rPr>
+              <a:t>down-right.</a:t>
             </a:r>
           </a:p>
         </p:txBody>
@@ -5426,8 +5327,8 @@
         </p:nvSpPr>
         <p:spPr>
           <a:xfrm>
-            <a:off x="15116072" y="14871923"/>
-            <a:ext cx="3326812" cy="360596"/>
+            <a:off x="10941722" y="26417376"/>
+            <a:ext cx="3507419" cy="400930"/>
           </a:xfrm>
           <a:prstGeom prst="rect">
             <a:avLst/>
@@ -5441,67 +5342,22 @@
           <a:lstStyle/>
           <a:p>
             <a:r>
-              <a:rPr sz="2840" b="0" i="0">
-                <a:solidFill>
-                  <a:srgbClr val="D03B3B"/>
-                </a:solidFill>
-                <a:latin typeface="Arial"/>
-              </a:rPr>
-              <a:t>that</a:t>
-            </a:r>
-            <a:r>
-              <a:rPr sz="2840" b="0" i="0">
-                <a:solidFill>
-                  <a:srgbClr val="D03B3B"/>
-                </a:solidFill>
-                <a:latin typeface="Arial"/>
-              </a:rPr>
-              <a:t> </a:t>
-            </a:r>
-            <a:r>
-              <a:rPr sz="2840" b="0" i="0">
-                <a:solidFill>
-                  <a:srgbClr val="D03B3B"/>
-                </a:solidFill>
-                <a:latin typeface="Arial"/>
-              </a:rPr>
-              <a:t>fit</a:t>
-            </a:r>
-            <a:r>
-              <a:rPr sz="2840" b="0" i="0">
-                <a:solidFill>
-                  <a:srgbClr val="D03B3B"/>
-                </a:solidFill>
-                <a:latin typeface="Arial"/>
-              </a:rPr>
-              <a:t> </a:t>
-            </a:r>
-            <a:r>
-              <a:rPr sz="2840" b="0" i="0">
-                <a:solidFill>
-                  <a:srgbClr val="D03B3B"/>
-                </a:solidFill>
-                <a:latin typeface="Arial"/>
-              </a:rPr>
-              <a:t>the</a:t>
-            </a:r>
-            <a:r>
-              <a:rPr sz="2840" b="0" i="0">
-                <a:solidFill>
-                  <a:srgbClr val="D03B3B"/>
-                </a:solidFill>
-                <a:latin typeface="Arial"/>
-              </a:rPr>
-              <a:t> </a:t>
-            </a:r>
-            <a:r>
-              <a:rPr sz="2840" b="0" i="0">
-                <a:solidFill>
-                  <a:srgbClr val="D03B3B"/>
-                </a:solidFill>
-                <a:latin typeface="Arial"/>
-              </a:rPr>
-              <a:t>examples</a:t>
+              <a:rPr sz="2590" b="0" i="0">
+                <a:solidFill>
+                  <a:srgbClr val="0CA30C"/>
+                </a:solidFill>
+                <a:latin typeface="Arial"/>
+              </a:rPr>
+              <a:t>✓</a:t>
+            </a:r>
+            <a:r>
+              <a:rPr sz="2460" b="0" i="0">
+                <a:solidFill>
+                  <a:srgbClr val="0B0B0B"/>
+                </a:solidFill>
+                <a:latin typeface="Arial"/>
+              </a:rPr>
+              <a:t>constructed by CORA</a:t>
             </a:r>
           </a:p>
         </p:txBody>
@@ -5514,8 +5370,8 @@
         </p:nvSpPr>
         <p:spPr>
           <a:xfrm>
-            <a:off x="15667113" y="15352718"/>
-            <a:ext cx="2224831" cy="360596"/>
+            <a:off x="10941722" y="26858317"/>
+            <a:ext cx="3109586" cy="400930"/>
           </a:xfrm>
           <a:prstGeom prst="rect">
             <a:avLst/>
@@ -5529,49 +5385,22 @@
           <a:lstStyle/>
           <a:p>
             <a:r>
-              <a:rPr sz="2840" b="0" i="0">
-                <a:solidFill>
-                  <a:srgbClr val="D03B3B"/>
-                </a:solidFill>
-                <a:latin typeface="Arial"/>
-              </a:rPr>
-              <a:t>failed</a:t>
-            </a:r>
-            <a:r>
-              <a:rPr sz="2840" b="0" i="0">
-                <a:solidFill>
-                  <a:srgbClr val="D03B3B"/>
-                </a:solidFill>
-                <a:latin typeface="Arial"/>
-              </a:rPr>
-              <a:t> </a:t>
-            </a:r>
-            <a:r>
-              <a:rPr sz="2840" b="0" i="0">
-                <a:solidFill>
-                  <a:srgbClr val="D03B3B"/>
-                </a:solidFill>
-                <a:latin typeface="Arial"/>
-              </a:rPr>
-              <a:t>the</a:t>
-            </a:r>
-            <a:r>
-              <a:rPr sz="2840" b="0" i="0">
-                <a:solidFill>
-                  <a:srgbClr val="D03B3B"/>
-                </a:solidFill>
-                <a:latin typeface="Arial"/>
-              </a:rPr>
-              <a:t> </a:t>
-            </a:r>
-            <a:r>
-              <a:rPr sz="2840" b="0" i="0">
-                <a:solidFill>
-                  <a:srgbClr val="D03B3B"/>
-                </a:solidFill>
-                <a:latin typeface="Arial"/>
-              </a:rPr>
-              <a:t>test</a:t>
+              <a:rPr sz="2590" b="0" i="0">
+                <a:solidFill>
+                  <a:srgbClr val="0CA30C"/>
+                </a:solidFill>
+                <a:latin typeface="Arial"/>
+              </a:rPr>
+              <a:t>✓</a:t>
+            </a:r>
+            <a:r>
+              <a:rPr sz="2460" b="0" i="0">
+                <a:solidFill>
+                  <a:srgbClr val="0B0B0B"/>
+                </a:solidFill>
+                <a:latin typeface="Arial"/>
+              </a:rPr>
+              <a:t>correct on this task</a:t>
             </a:r>
           </a:p>
         </p:txBody>
@@ -5584,8 +5413,8 @@
         </p:nvSpPr>
         <p:spPr>
           <a:xfrm>
-            <a:off x="10837861" y="15918941"/>
-            <a:ext cx="7446828" cy="312515"/>
+            <a:off x="10941722" y="27299263"/>
+            <a:ext cx="6007875" cy="400930"/>
           </a:xfrm>
           <a:prstGeom prst="rect">
             <a:avLst/>
@@ -5599,13 +5428,22 @@
           <a:lstStyle/>
           <a:p>
             <a:r>
+              <a:rPr sz="2590" b="0" i="0">
+                <a:solidFill>
+                  <a:srgbClr val="0CA30C"/>
+                </a:solidFill>
+                <a:latin typeface="Arial"/>
+              </a:rPr>
+              <a:t>✓</a:t>
+            </a:r>
+            <a:r>
               <a:rPr sz="2460" b="0" i="0">
                 <a:solidFill>
-                  <a:srgbClr val="52514E"/>
-                </a:solidFill>
-                <a:latin typeface="Arial"/>
-              </a:rPr>
-              <a:t>60 exposed ARC-AGI-2 training tasks; CORA’s object</a:t>
+                  <a:srgbClr val="0B0B0B"/>
+                </a:solidFill>
+                <a:latin typeface="Arial"/>
+              </a:rPr>
+              <a:t>rebuilt 3 of 3 times, one example hidden</a:t>
             </a:r>
           </a:p>
         </p:txBody>
@@ -5618,8 +5456,8 @@
         </p:nvSpPr>
         <p:spPr>
           <a:xfrm>
-            <a:off x="10837861" y="16323816"/>
-            <a:ext cx="3229408" cy="312515"/>
+            <a:off x="11033352" y="27828617"/>
+            <a:ext cx="5327148" cy="312774"/>
           </a:xfrm>
           <a:prstGeom prst="rect">
             <a:avLst/>
@@ -5633,13 +5471,31 @@
           <a:lstStyle/>
           <a:p>
             <a:r>
+              <a:rPr sz="2460" b="1" i="0">
+                <a:solidFill>
+                  <a:srgbClr val="52514E"/>
+                </a:solidFill>
+                <a:latin typeface="Arial"/>
+              </a:rPr>
+              <a:t>=</a:t>
+            </a:r>
+            <a:r>
               <a:rPr sz="2460" b="0" i="0">
                 <a:solidFill>
-                  <a:srgbClr val="52514E"/>
-                </a:solidFill>
-                <a:latin typeface="Arial"/>
-              </a:rPr>
-              <a:t>reasoner as submitted.</a:t>
+                  <a:srgbClr val="0B0B0B"/>
+                </a:solidFill>
+                <a:latin typeface="Arial"/>
+              </a:rPr>
+              <a:t> </a:t>
+            </a:r>
+            <a:r>
+              <a:rPr sz="2460" b="0" i="0">
+                <a:solidFill>
+                  <a:srgbClr val="0B0B0B"/>
+                </a:solidFill>
+                <a:latin typeface="Arial"/>
+              </a:rPr>
+              <a:t>also found without the failure record</a:t>
             </a:r>
           </a:p>
         </p:txBody>
@@ -5652,8 +5508,8 @@
         </p:nvSpPr>
         <p:spPr>
           <a:xfrm>
-            <a:off x="10837862" y="17523548"/>
-            <a:ext cx="6857131" cy="480795"/>
+            <a:off x="10837860" y="28359965"/>
+            <a:ext cx="7212756" cy="312517"/>
           </a:xfrm>
           <a:prstGeom prst="rect">
             <a:avLst/>
@@ -5667,22 +5523,13 @@
           <a:lstStyle/>
           <a:p>
             <a:r>
-              <a:rPr sz="3790" b="1" i="0">
-                <a:solidFill>
-                  <a:srgbClr val="2A78D6"/>
-                </a:solidFill>
-                <a:latin typeface="Arial"/>
-              </a:rPr>
-              <a:t>A rule CORA built</a:t>
-            </a:r>
-            <a:r>
               <a:rPr sz="2460" b="1" i="0">
                 <a:solidFill>
-                  <a:srgbClr val="0CA30C"/>
-                </a:solidFill>
-                <a:latin typeface="Arial"/>
-              </a:rPr>
-              <a:t> [DONE, NARROW]</a:t>
+                  <a:srgbClr val="52514E"/>
+                </a:solidFill>
+                <a:latin typeface="Arial"/>
+              </a:rPr>
+              <a:t>An exposed training task, not a Kaggle success.</a:t>
             </a:r>
           </a:p>
         </p:txBody>
@@ -5695,8 +5542,8 @@
         </p:nvSpPr>
         <p:spPr>
           <a:xfrm>
-            <a:off x="10837862" y="26668257"/>
-            <a:ext cx="7414148" cy="360892"/>
+            <a:off x="10837862" y="29625376"/>
+            <a:ext cx="5871036" cy="480795"/>
           </a:xfrm>
           <a:prstGeom prst="rect">
             <a:avLst/>
@@ -5710,31 +5557,22 @@
           <a:lstStyle/>
           <a:p>
             <a:r>
-              <a:rPr sz="2840" b="1" i="0">
-                <a:solidFill>
-                  <a:srgbClr val="0B0B0B"/>
-                </a:solidFill>
-                <a:latin typeface="Arial"/>
-              </a:rPr>
-              <a:t>The rule:</a:t>
-            </a:r>
-            <a:r>
-              <a:rPr sz="2840" b="0" i="0">
-                <a:solidFill>
-                  <a:srgbClr val="0B0B0B"/>
-                </a:solidFill>
-                <a:latin typeface="Arial"/>
-              </a:rPr>
-              <a:t> </a:t>
-            </a:r>
-            <a:r>
-              <a:rPr sz="2840" b="0" i="0">
-                <a:solidFill>
-                  <a:srgbClr val="0B0B0B"/>
-                </a:solidFill>
-                <a:latin typeface="Arial"/>
-              </a:rPr>
-              <a:t>each object extends a diagonal line,</a:t>
+              <a:rPr sz="3790" b="1" i="0">
+                <a:solidFill>
+                  <a:srgbClr val="2A78D6"/>
+                </a:solidFill>
+                <a:latin typeface="Arial"/>
+              </a:rPr>
+              <a:t>Did it generalize?</a:t>
+            </a:r>
+            <a:r>
+              <a:rPr sz="2460" b="1" i="0">
+                <a:solidFill>
+                  <a:srgbClr val="D03B3B"/>
+                </a:solidFill>
+                <a:latin typeface="Arial"/>
+              </a:rPr>
+              <a:t> [NEGATIVE]</a:t>
             </a:r>
           </a:p>
         </p:txBody>
@@ -5747,8 +5585,8 @@
         </p:nvSpPr>
         <p:spPr>
           <a:xfrm>
-            <a:off x="10837862" y="27149056"/>
-            <a:ext cx="7950665" cy="360892"/>
+            <a:off x="13318413" y="30765198"/>
+            <a:ext cx="3659649" cy="1442386"/>
           </a:xfrm>
           <a:prstGeom prst="rect">
             <a:avLst/>
@@ -5762,58 +5600,13 @@
           <a:lstStyle/>
           <a:p>
             <a:r>
-              <a:rPr sz="2840" b="0" i="0">
-                <a:solidFill>
-                  <a:srgbClr val="0B0B0B"/>
-                </a:solidFill>
-                <a:latin typeface="Arial"/>
-              </a:rPr>
-              <a:t>chosen by its colour:</a:t>
-            </a:r>
-            <a:r>
-              <a:rPr sz="2840" b="1" i="0">
-                <a:solidFill>
-                  <a:srgbClr val="0074D9"/>
-                </a:solidFill>
-                <a:latin typeface="Arial"/>
-              </a:rPr>
-              <a:t> </a:t>
-            </a:r>
-            <a:r>
-              <a:rPr sz="2840" b="1" i="0">
-                <a:solidFill>
-                  <a:srgbClr val="0074D9"/>
-                </a:solidFill>
-                <a:latin typeface="Arial"/>
-              </a:rPr>
-              <a:t>blue</a:t>
-            </a:r>
-            <a:r>
-              <a:rPr sz="2840" b="0" i="0">
-                <a:solidFill>
-                  <a:srgbClr val="0B0B0B"/>
-                </a:solidFill>
-                <a:latin typeface="Arial"/>
-              </a:rPr>
-              <a:t> up-left,</a:t>
-            </a:r>
-            <a:r>
-              <a:rPr sz="2840" b="1" i="0">
-                <a:solidFill>
-                  <a:srgbClr val="FF4136"/>
-                </a:solidFill>
-                <a:latin typeface="Arial"/>
-              </a:rPr>
-              <a:t> red</a:t>
-            </a:r>
-            <a:r>
-              <a:rPr sz="2840" b="0" i="0">
-                <a:solidFill>
-                  <a:srgbClr val="0B0B0B"/>
-                </a:solidFill>
-                <a:latin typeface="Arial"/>
-              </a:rPr>
-              <a:t> down-right.</a:t>
+              <a:rPr sz="11360" b="1" i="0">
+                <a:solidFill>
+                  <a:srgbClr val="D03B3B"/>
+                </a:solidFill>
+                <a:latin typeface="Arial"/>
+              </a:rPr>
+              <a:t>0 / 58</a:t>
             </a:r>
           </a:p>
         </p:txBody>
@@ -5826,8 +5619,8 @@
         </p:nvSpPr>
         <p:spPr>
           <a:xfrm>
-            <a:off x="10941723" y="27628750"/>
-            <a:ext cx="5855675" cy="400930"/>
+            <a:off x="13404760" y="32113559"/>
+            <a:ext cx="3486917" cy="360595"/>
           </a:xfrm>
           <a:prstGeom prst="rect">
             <a:avLst/>
@@ -5841,22 +5634,13 @@
           <a:lstStyle/>
           <a:p>
             <a:r>
-              <a:rPr sz="2590" b="0" i="0">
-                <a:solidFill>
-                  <a:srgbClr val="0CA30C"/>
-                </a:solidFill>
-                <a:latin typeface="Arial"/>
-              </a:rPr>
-              <a:t>✓</a:t>
-            </a:r>
-            <a:r>
-              <a:rPr sz="2460" b="0" i="0">
+              <a:rPr sz="2840" b="0" i="0">
                 <a:solidFill>
                   <a:srgbClr val="0B0B0B"/>
                 </a:solidFill>
                 <a:latin typeface="Arial"/>
               </a:rPr>
-              <a:t>CORA constructed this executable rule</a:t>
+              <a:t>new verified solutions</a:t>
             </a:r>
           </a:p>
         </p:txBody>
@@ -5869,8 +5653,8 @@
         </p:nvSpPr>
         <p:spPr>
           <a:xfrm>
-            <a:off x="10941723" y="28069694"/>
-            <a:ext cx="6410083" cy="400930"/>
+            <a:off x="10837862" y="35540639"/>
+            <a:ext cx="5772052" cy="312517"/>
           </a:xfrm>
           <a:prstGeom prst="rect">
             <a:avLst/>
@@ -5884,22 +5668,13 @@
           <a:lstStyle/>
           <a:p>
             <a:r>
-              <a:rPr sz="2590" b="0" i="0">
-                <a:solidFill>
-                  <a:srgbClr val="0CA30C"/>
-                </a:solidFill>
-                <a:latin typeface="Arial"/>
-              </a:rPr>
-              <a:t>✓</a:t>
-            </a:r>
-            <a:r>
               <a:rPr sz="2460" b="0" i="0">
                 <a:solidFill>
-                  <a:srgbClr val="0B0B0B"/>
-                </a:solidFill>
-                <a:latin typeface="Arial"/>
-              </a:rPr>
-              <a:t>correct prediction on this development task</a:t>
+                  <a:srgbClr val="52514E"/>
+                </a:solidFill>
+                <a:latin typeface="Arial"/>
+              </a:rPr>
+              <a:t>Every variant found 0; no wrong answers.</a:t>
             </a:r>
           </a:p>
         </p:txBody>
@@ -5912,8 +5687,8 @@
         </p:nvSpPr>
         <p:spPr>
           <a:xfrm>
-            <a:off x="10941723" y="28510625"/>
-            <a:ext cx="6568220" cy="400930"/>
+            <a:off x="20739735" y="7846626"/>
+            <a:ext cx="7800116" cy="544059"/>
           </a:xfrm>
           <a:prstGeom prst="rect">
             <a:avLst/>
@@ -5927,22 +5702,49 @@
           <a:lstStyle/>
           <a:p>
             <a:r>
-              <a:rPr sz="2590" b="0" i="0">
-                <a:solidFill>
-                  <a:srgbClr val="0CA30C"/>
-                </a:solidFill>
-                <a:latin typeface="Arial"/>
-              </a:rPr>
-              <a:t>✓</a:t>
-            </a:r>
-            <a:r>
-              <a:rPr sz="2460" b="0" i="0">
-                <a:solidFill>
-                  <a:srgbClr val="0B0B0B"/>
-                </a:solidFill>
-                <a:latin typeface="Arial"/>
-              </a:rPr>
-              <a:t>rebuilt 3 of 3 times with one example left out</a:t>
+              <a:rPr sz="3790" b="1" i="0">
+                <a:solidFill>
+                  <a:srgbClr val="2A78D6"/>
+                </a:solidFill>
+                <a:latin typeface="Arial"/>
+              </a:rPr>
+              <a:t>3</a:t>
+            </a:r>
+            <a:r>
+              <a:rPr sz="4280" b="0" i="1">
+                <a:solidFill>
+                  <a:srgbClr val="2A78D6"/>
+                </a:solidFill>
+                <a:latin typeface="Arial"/>
+              </a:rPr>
+              <a:t> </a:t>
+            </a:r>
+            <a:r>
+              <a:rPr sz="4280" b="0" i="1">
+                <a:solidFill>
+                  <a:srgbClr val="2A78D6"/>
+                </a:solidFill>
+                <a:latin typeface="Arial"/>
+              </a:rPr>
+              <a:t>·</a:t>
+            </a:r>
+            <a:r>
+              <a:rPr sz="3790" b="1" i="0">
+                <a:solidFill>
+                  <a:srgbClr val="2A78D6"/>
+                </a:solidFill>
+                <a:latin typeface="Arial"/>
+              </a:rPr>
+              <a:t> </a:t>
+            </a:r>
+            <a:r>
+              <a:rPr sz="3790" b="1" i="0">
+                <a:solidFill>
+                  <a:srgbClr val="2A78D6"/>
+                </a:solidFill>
+                <a:latin typeface="Arial"/>
+              </a:rPr>
+              <a:t>How neural learning may help</a:t>
             </a:r>
           </a:p>
         </p:txBody>
@@ -5955,8 +5757,8 @@
         </p:nvSpPr>
         <p:spPr>
           <a:xfrm>
-            <a:off x="11033353" y="29039982"/>
-            <a:ext cx="6672536" cy="312774"/>
+            <a:off x="21313571" y="9468674"/>
+            <a:ext cx="3045034" cy="264438"/>
           </a:xfrm>
           <a:prstGeom prst="rect">
             <a:avLst/>
@@ -5970,31 +5772,13 @@
           <a:lstStyle/>
           <a:p>
             <a:r>
-              <a:rPr sz="2460" b="1" i="0">
-                <a:solidFill>
-                  <a:srgbClr val="52514E"/>
-                </a:solidFill>
-                <a:latin typeface="Arial"/>
-              </a:rPr>
-              <a:t>=</a:t>
-            </a:r>
-            <a:r>
-              <a:rPr sz="2460" b="0" i="0">
-                <a:solidFill>
-                  <a:srgbClr val="0B0B0B"/>
-                </a:solidFill>
-                <a:latin typeface="Arial"/>
-              </a:rPr>
-              <a:t> </a:t>
-            </a:r>
-            <a:r>
-              <a:rPr sz="2460" b="0" i="0">
-                <a:solidFill>
-                  <a:srgbClr val="0B0B0B"/>
-                </a:solidFill>
-                <a:latin typeface="Arial"/>
-              </a:rPr>
-              <a:t>a version blind to failures found the same rule</a:t>
+              <a:rPr sz="2080" b="1" i="0">
+                <a:solidFill>
+                  <a:srgbClr val="52514E"/>
+                </a:solidFill>
+                <a:latin typeface="Arial"/>
+              </a:rPr>
+              <a:t>existing neural baseline</a:t>
             </a:r>
           </a:p>
         </p:txBody>
@@ -6007,8 +5791,8 @@
         </p:nvSpPr>
         <p:spPr>
           <a:xfrm>
-            <a:off x="10837862" y="29571342"/>
-            <a:ext cx="7941233" cy="312517"/>
+            <a:off x="25535839" y="9468674"/>
+            <a:ext cx="3456492" cy="264438"/>
           </a:xfrm>
           <a:prstGeom prst="rect">
             <a:avLst/>
@@ -6022,13 +5806,13 @@
           <a:lstStyle/>
           <a:p>
             <a:r>
-              <a:rPr sz="2460" b="1" i="0">
-                <a:solidFill>
-                  <a:srgbClr val="52514E"/>
-                </a:solidFill>
-                <a:latin typeface="Arial"/>
-              </a:rPr>
-              <a:t>An exposed ARC training task, not an unseen Kaggle</a:t>
+              <a:rPr sz="2080" b="1" i="0">
+                <a:solidFill>
+                  <a:srgbClr val="52514E"/>
+                </a:solidFill>
+                <a:latin typeface="Arial"/>
+              </a:rPr>
+              <a:t>existing symbolic reasoner</a:t>
             </a:r>
           </a:p>
         </p:txBody>
@@ -6041,8 +5825,8 @@
         </p:nvSpPr>
         <p:spPr>
           <a:xfrm>
-            <a:off x="10837862" y="29976216"/>
-            <a:ext cx="1371182" cy="312517"/>
+            <a:off x="21873210" y="10014594"/>
+            <a:ext cx="1925730" cy="552914"/>
           </a:xfrm>
           <a:prstGeom prst="rect">
             <a:avLst/>
@@ -6056,13 +5840,13 @@
           <a:lstStyle/>
           <a:p>
             <a:r>
-              <a:rPr sz="2460" b="1" i="0">
-                <a:solidFill>
-                  <a:srgbClr val="52514E"/>
-                </a:solidFill>
-                <a:latin typeface="Arial"/>
-              </a:rPr>
-              <a:t>success.</a:t>
+              <a:rPr sz="4350" b="1" i="0">
+                <a:solidFill>
+                  <a:srgbClr val="0B0B0B"/>
+                </a:solidFill>
+                <a:latin typeface="Arial"/>
+              </a:rPr>
+              <a:t>27.64%</a:t>
             </a:r>
           </a:p>
         </p:txBody>
@@ -6075,8 +5859,8 @@
         </p:nvSpPr>
         <p:spPr>
           <a:xfrm>
-            <a:off x="10837862" y="31176010"/>
-            <a:ext cx="5871036" cy="480795"/>
+            <a:off x="26454912" y="10014594"/>
+            <a:ext cx="1618313" cy="552914"/>
           </a:xfrm>
           <a:prstGeom prst="rect">
             <a:avLst/>
@@ -6090,22 +5874,13 @@
           <a:lstStyle/>
           <a:p>
             <a:r>
-              <a:rPr sz="3790" b="1" i="0">
-                <a:solidFill>
-                  <a:srgbClr val="2A78D6"/>
-                </a:solidFill>
-                <a:latin typeface="Arial"/>
-              </a:rPr>
-              <a:t>Did it generalize?</a:t>
-            </a:r>
-            <a:r>
-              <a:rPr sz="2460" b="1" i="0">
-                <a:solidFill>
-                  <a:srgbClr val="D03B3B"/>
-                </a:solidFill>
-                <a:latin typeface="Arial"/>
-              </a:rPr>
-              <a:t> [NEGATIVE]</a:t>
+              <a:rPr sz="4350" b="1" i="0">
+                <a:solidFill>
+                  <a:srgbClr val="0B0B0B"/>
+                </a:solidFill>
+                <a:latin typeface="Arial"/>
+              </a:rPr>
+              <a:t>0.00%</a:t>
             </a:r>
           </a:p>
         </p:txBody>
@@ -6118,8 +5893,8 @@
         </p:nvSpPr>
         <p:spPr>
           <a:xfrm>
-            <a:off x="13318413" y="32315822"/>
-            <a:ext cx="3659649" cy="1442386"/>
+            <a:off x="22105163" y="10694933"/>
+            <a:ext cx="1461847" cy="264438"/>
           </a:xfrm>
           <a:prstGeom prst="rect">
             <a:avLst/>
@@ -6133,13 +5908,13 @@
           <a:lstStyle/>
           <a:p>
             <a:r>
-              <a:rPr sz="11360" b="1" i="0">
-                <a:solidFill>
-                  <a:srgbClr val="D03B3B"/>
-                </a:solidFill>
-                <a:latin typeface="Arial"/>
-              </a:rPr>
-              <a:t>0 / 58</a:t>
+              <a:rPr sz="2080" b="0" i="0">
+                <a:solidFill>
+                  <a:srgbClr val="52514E"/>
+                </a:solidFill>
+                <a:latin typeface="Arial"/>
+              </a:rPr>
+              <a:t>reproduced;</a:t>
             </a:r>
           </a:p>
         </p:txBody>
@@ -6152,8 +5927,8 @@
         </p:nvSpPr>
         <p:spPr>
           <a:xfrm>
-            <a:off x="11615863" y="33664180"/>
-            <a:ext cx="7064750" cy="360595"/>
+            <a:off x="22208160" y="11036549"/>
+            <a:ext cx="1255845" cy="264438"/>
           </a:xfrm>
           <a:prstGeom prst="rect">
             <a:avLst/>
@@ -6167,13 +5942,13 @@
           <a:lstStyle/>
           <a:p>
             <a:r>
-              <a:rPr sz="2840" b="0" i="0">
-                <a:solidFill>
-                  <a:srgbClr val="0B0B0B"/>
-                </a:solidFill>
-                <a:latin typeface="Arial"/>
-              </a:rPr>
-              <a:t>new verified solutions from rule construction</a:t>
+              <a:rPr sz="2080" b="0" i="0">
+                <a:solidFill>
+                  <a:srgbClr val="52514E"/>
+                </a:solidFill>
+                <a:latin typeface="Arial"/>
+              </a:rPr>
+              <a:t>not CORA</a:t>
             </a:r>
           </a:p>
         </p:txBody>
@@ -6186,8 +5961,8 @@
         </p:nvSpPr>
         <p:spPr>
           <a:xfrm>
-            <a:off x="10837862" y="37091261"/>
-            <a:ext cx="7674971" cy="312517"/>
+            <a:off x="26810552" y="10694933"/>
+            <a:ext cx="907048" cy="264438"/>
           </a:xfrm>
           <a:prstGeom prst="rect">
             <a:avLst/>
@@ -6201,49 +5976,13 @@
           <a:lstStyle/>
           <a:p>
             <a:r>
-              <a:rPr sz="2460" b="0" i="0">
-                <a:solidFill>
-                  <a:srgbClr val="52514E"/>
-                </a:solidFill>
-                <a:latin typeface="Arial"/>
-              </a:rPr>
-              <a:t>Shown:</a:t>
-            </a:r>
-            <a:r>
-              <a:rPr sz="2460" b="0" i="0">
-                <a:solidFill>
-                  <a:srgbClr val="52514E"/>
-                </a:solidFill>
-                <a:latin typeface="Arial"/>
-              </a:rPr>
-              <a:t> </a:t>
-            </a:r>
-            <a:r>
-              <a:rPr sz="2460" b="0" i="0">
-                <a:solidFill>
-                  <a:srgbClr val="52514E"/>
-                </a:solidFill>
-                <a:latin typeface="Arial"/>
-              </a:rPr>
-              <a:t>construction that used the failure record.</a:t>
-            </a:r>
-            <a:r>
-              <a:rPr sz="2460" b="0" i="0">
-                <a:solidFill>
-                  <a:srgbClr val="52514E"/>
-                </a:solidFill>
-                <a:latin typeface="Arial"/>
-              </a:rPr>
-              <a:t> </a:t>
-            </a:r>
-            <a:r>
-              <a:rPr sz="2460" b="0" i="0">
-                <a:solidFill>
-                  <a:srgbClr val="52514E"/>
-                </a:solidFill>
-                <a:latin typeface="Arial"/>
-              </a:rPr>
-              <a:t>Every</a:t>
+              <a:rPr sz="2080" b="0" i="0">
+                <a:solidFill>
+                  <a:srgbClr val="52514E"/>
+                </a:solidFill>
+                <a:latin typeface="Arial"/>
+              </a:rPr>
+              <a:t>original</a:t>
             </a:r>
           </a:p>
         </p:txBody>
@@ -6256,8 +5995,8 @@
         </p:nvSpPr>
         <p:spPr>
           <a:xfrm>
-            <a:off x="10837862" y="37496151"/>
-            <a:ext cx="4884815" cy="312517"/>
+            <a:off x="26856692" y="11036549"/>
+            <a:ext cx="814762" cy="264438"/>
           </a:xfrm>
           <a:prstGeom prst="rect">
             <a:avLst/>
@@ -6271,13 +6010,13 @@
           <a:lstStyle/>
           <a:p>
             <a:r>
-              <a:rPr sz="2460" b="0" i="0">
-                <a:solidFill>
-                  <a:srgbClr val="52514E"/>
-                </a:solidFill>
-                <a:latin typeface="Arial"/>
-              </a:rPr>
-              <a:t>variant found 0; no wrong answers.</a:t>
+              <a:rPr sz="2080" b="0" i="0">
+                <a:solidFill>
+                  <a:srgbClr val="52514E"/>
+                </a:solidFill>
+                <a:latin typeface="Arial"/>
+              </a:rPr>
+              <a:t>CORA</a:t>
             </a:r>
           </a:p>
         </p:txBody>
@@ -6290,8 +6029,8 @@
         </p:nvSpPr>
         <p:spPr>
           <a:xfrm>
-            <a:off x="20739735" y="9336461"/>
-            <a:ext cx="7800116" cy="544059"/>
+            <a:off x="20739735" y="19731713"/>
+            <a:ext cx="7759250" cy="360596"/>
           </a:xfrm>
           <a:prstGeom prst="rect">
             <a:avLst/>
@@ -6305,49 +6044,13 @@
           <a:lstStyle/>
           <a:p>
             <a:r>
-              <a:rPr sz="3790" b="1" i="0">
-                <a:solidFill>
-                  <a:srgbClr val="2A78D6"/>
-                </a:solidFill>
-                <a:latin typeface="Arial"/>
-              </a:rPr>
-              <a:t>3</a:t>
-            </a:r>
-            <a:r>
-              <a:rPr sz="4280" b="0" i="1">
-                <a:solidFill>
-                  <a:srgbClr val="2A78D6"/>
-                </a:solidFill>
-                <a:latin typeface="Arial"/>
-              </a:rPr>
-              <a:t> </a:t>
-            </a:r>
-            <a:r>
-              <a:rPr sz="4280" b="0" i="1">
-                <a:solidFill>
-                  <a:srgbClr val="2A78D6"/>
-                </a:solidFill>
-                <a:latin typeface="Arial"/>
-              </a:rPr>
-              <a:t>·</a:t>
-            </a:r>
-            <a:r>
-              <a:rPr sz="3790" b="1" i="0">
-                <a:solidFill>
-                  <a:srgbClr val="2A78D6"/>
-                </a:solidFill>
-                <a:latin typeface="Arial"/>
-              </a:rPr>
-              <a:t> </a:t>
-            </a:r>
-            <a:r>
-              <a:rPr sz="3790" b="1" i="0">
-                <a:solidFill>
-                  <a:srgbClr val="2A78D6"/>
-                </a:solidFill>
-                <a:latin typeface="Arial"/>
-              </a:rPr>
-              <a:t>How neural learning may help</a:t>
+              <a:rPr sz="2840" b="1" i="0">
+                <a:solidFill>
+                  <a:srgbClr val="0B0B0B"/>
+                </a:solidFill>
+                <a:latin typeface="Arial"/>
+              </a:rPr>
+              <a:t>Can neural learning help a reasoner discover</a:t>
             </a:r>
           </a:p>
         </p:txBody>
@@ -6360,8 +6063,8 @@
         </p:nvSpPr>
         <p:spPr>
           <a:xfrm>
-            <a:off x="21335479" y="10958500"/>
-            <a:ext cx="3045034" cy="264438"/>
+            <a:off x="20739735" y="20212510"/>
+            <a:ext cx="7344931" cy="360596"/>
           </a:xfrm>
           <a:prstGeom prst="rect">
             <a:avLst/>
@@ -6375,13 +6078,13 @@
           <a:lstStyle/>
           <a:p>
             <a:r>
-              <a:rPr sz="2080" b="1" i="0">
-                <a:solidFill>
-                  <a:srgbClr val="52514E"/>
-                </a:solidFill>
-                <a:latin typeface="Arial"/>
-              </a:rPr>
-              <a:t>existing neural baseline</a:t>
+              <a:rPr sz="2840" b="1" i="0">
+                <a:solidFill>
+                  <a:srgbClr val="0B0B0B"/>
+                </a:solidFill>
+                <a:latin typeface="Arial"/>
+              </a:rPr>
+              <a:t>useful representations and rules—and can</a:t>
             </a:r>
           </a:p>
         </p:txBody>
@@ -6394,8 +6097,8 @@
         </p:nvSpPr>
         <p:spPr>
           <a:xfrm>
-            <a:off x="25557746" y="10958500"/>
-            <a:ext cx="3456494" cy="264438"/>
+            <a:off x="20739735" y="20693307"/>
+            <a:ext cx="8274186" cy="360596"/>
           </a:xfrm>
           <a:prstGeom prst="rect">
             <a:avLst/>
@@ -6409,13 +6112,13 @@
           <a:lstStyle/>
           <a:p>
             <a:r>
-              <a:rPr sz="2080" b="1" i="0">
-                <a:solidFill>
-                  <a:srgbClr val="52514E"/>
-                </a:solidFill>
-                <a:latin typeface="Arial"/>
-              </a:rPr>
-              <a:t>existing symbolic reasoner</a:t>
+              <a:rPr sz="2840" b="1" i="0">
+                <a:solidFill>
+                  <a:srgbClr val="0B0B0B"/>
+                </a:solidFill>
+                <a:latin typeface="Arial"/>
+              </a:rPr>
+              <a:t>executable verification help it determine what to</a:t>
             </a:r>
           </a:p>
         </p:txBody>
@@ -6428,8 +6131,8 @@
         </p:nvSpPr>
         <p:spPr>
           <a:xfrm>
-            <a:off x="21895117" y="11504416"/>
-            <a:ext cx="1925730" cy="552914"/>
+            <a:off x="20739735" y="21174104"/>
+            <a:ext cx="8561939" cy="360596"/>
           </a:xfrm>
           <a:prstGeom prst="rect">
             <a:avLst/>
@@ -6443,13 +6146,13 @@
           <a:lstStyle/>
           <a:p>
             <a:r>
-              <a:rPr sz="4350" b="1" i="0">
+              <a:rPr sz="2840" b="1" i="0">
                 <a:solidFill>
                   <a:srgbClr val="0B0B0B"/>
                 </a:solidFill>
                 <a:latin typeface="Arial"/>
               </a:rPr>
-              <a:t>27.64%</a:t>
+              <a:t>change when those explanations are inadequate?</a:t>
             </a:r>
           </a:p>
         </p:txBody>
@@ -6462,8 +6165,8 @@
         </p:nvSpPr>
         <p:spPr>
           <a:xfrm>
-            <a:off x="26476821" y="11504416"/>
-            <a:ext cx="1618313" cy="552914"/>
+            <a:off x="20739735" y="21723869"/>
+            <a:ext cx="7604342" cy="312515"/>
           </a:xfrm>
           <a:prstGeom prst="rect">
             <a:avLst/>
@@ -6477,13 +6180,67 @@
           <a:lstStyle/>
           <a:p>
             <a:r>
-              <a:rPr sz="4350" b="1" i="0">
-                <a:solidFill>
-                  <a:srgbClr val="0B0B0B"/>
-                </a:solidFill>
-                <a:latin typeface="Arial"/>
-              </a:rPr>
-              <a:t>0.00%</a:t>
+              <a:rPr sz="2460" b="0" i="0">
+                <a:solidFill>
+                  <a:srgbClr val="52514E"/>
+                </a:solidFill>
+                <a:latin typeface="Arial"/>
+              </a:rPr>
+              <a:t>Solid:</a:t>
+            </a:r>
+            <a:r>
+              <a:rPr sz="2460" b="0" i="0">
+                <a:solidFill>
+                  <a:srgbClr val="52514E"/>
+                </a:solidFill>
+                <a:latin typeface="Arial"/>
+              </a:rPr>
+              <a:t> </a:t>
+            </a:r>
+            <a:r>
+              <a:rPr sz="2460" b="0" i="0">
+                <a:solidFill>
+                  <a:srgbClr val="52514E"/>
+                </a:solidFill>
+                <a:latin typeface="Arial"/>
+              </a:rPr>
+              <a:t>existing.</a:t>
+            </a:r>
+            <a:r>
+              <a:rPr sz="2460" b="0" i="0">
+                <a:solidFill>
+                  <a:srgbClr val="52514E"/>
+                </a:solidFill>
+                <a:latin typeface="Arial"/>
+              </a:rPr>
+              <a:t> </a:t>
+            </a:r>
+            <a:r>
+              <a:rPr sz="2460" b="0" i="0">
+                <a:solidFill>
+                  <a:srgbClr val="52514E"/>
+                </a:solidFill>
+                <a:latin typeface="Arial"/>
+              </a:rPr>
+              <a:t>Dashed:</a:t>
+            </a:r>
+            <a:r>
+              <a:rPr sz="2460" b="0" i="0">
+                <a:solidFill>
+                  <a:srgbClr val="52514E"/>
+                </a:solidFill>
+                <a:latin typeface="Arial"/>
+              </a:rPr>
+              <a:t> </a:t>
+            </a:r>
+            <a:r>
+              <a:rPr sz="2460" b="0" i="0">
+                <a:solidFill>
+                  <a:srgbClr val="52514E"/>
+                </a:solidFill>
+                <a:latin typeface="Arial"/>
+              </a:rPr>
+              <a:t>proposed; the neural proposal</a:t>
             </a:r>
           </a:p>
         </p:txBody>
@@ -6496,8 +6253,8 @@
         </p:nvSpPr>
         <p:spPr>
           <a:xfrm>
-            <a:off x="20978621" y="12184758"/>
-            <a:ext cx="3758759" cy="264438"/>
+            <a:off x="20739735" y="22128757"/>
+            <a:ext cx="7968422" cy="312515"/>
           </a:xfrm>
           <a:prstGeom prst="rect">
             <a:avLst/>
@@ -6511,13 +6268,13 @@
           <a:lstStyle/>
           <a:p>
             <a:r>
-              <a:rPr sz="2080" b="0" i="0">
-                <a:solidFill>
-                  <a:srgbClr val="52514E"/>
-                </a:solidFill>
-                <a:latin typeface="Arial"/>
-              </a:rPr>
-              <a:t>public score; published method,</a:t>
+              <a:rPr sz="2460" b="0" i="0">
+                <a:solidFill>
+                  <a:srgbClr val="52514E"/>
+                </a:solidFill>
+                <a:latin typeface="Arial"/>
+              </a:rPr>
+              <a:t>interface has not yet been implemented or experimentally</a:t>
             </a:r>
           </a:p>
         </p:txBody>
@@ -6530,8 +6287,8 @@
         </p:nvSpPr>
         <p:spPr>
           <a:xfrm>
-            <a:off x="21487790" y="12526374"/>
-            <a:ext cx="2740404" cy="264438"/>
+            <a:off x="20739735" y="22533633"/>
+            <a:ext cx="4524486" cy="312515"/>
           </a:xfrm>
           <a:prstGeom prst="rect">
             <a:avLst/>
@@ -6545,13 +6302,49 @@
           <a:lstStyle/>
           <a:p>
             <a:r>
-              <a:rPr sz="2080" b="0" i="0">
-                <a:solidFill>
-                  <a:srgbClr val="52514E"/>
-                </a:solidFill>
-                <a:latin typeface="Arial"/>
-              </a:rPr>
-              <a:t>reproduced; not CORA</a:t>
+              <a:rPr sz="2460" b="0" i="0">
+                <a:solidFill>
+                  <a:srgbClr val="52514E"/>
+                </a:solidFill>
+                <a:latin typeface="Arial"/>
+              </a:rPr>
+              <a:t>validated.</a:t>
+            </a:r>
+            <a:r>
+              <a:rPr sz="2460" b="0" i="0">
+                <a:solidFill>
+                  <a:srgbClr val="52514E"/>
+                </a:solidFill>
+                <a:latin typeface="Arial"/>
+              </a:rPr>
+              <a:t> </a:t>
+            </a:r>
+            <a:r>
+              <a:rPr sz="2460" b="0" i="0">
+                <a:solidFill>
+                  <a:srgbClr val="52514E"/>
+                </a:solidFill>
+                <a:latin typeface="Arial"/>
+              </a:rPr>
+              <a:t>Scores:</a:t>
+            </a:r>
+            <a:r>
+              <a:rPr sz="2460" b="0" i="0">
+                <a:solidFill>
+                  <a:srgbClr val="52514E"/>
+                </a:solidFill>
+                <a:latin typeface="Arial"/>
+              </a:rPr>
+              <a:t> </a:t>
+            </a:r>
+            <a:r>
+              <a:rPr sz="2460" b="0" i="0">
+                <a:solidFill>
+                  <a:srgbClr val="52514E"/>
+                </a:solidFill>
+                <a:latin typeface="Arial"/>
+              </a:rPr>
+              <a:t>official public.</a:t>
             </a:r>
           </a:p>
         </p:txBody>
@@ -6564,8 +6357,8 @@
         </p:nvSpPr>
         <p:spPr>
           <a:xfrm>
-            <a:off x="26056208" y="12184758"/>
-            <a:ext cx="2459561" cy="264438"/>
+            <a:off x="20739748" y="23795558"/>
+            <a:ext cx="4800096" cy="480795"/>
           </a:xfrm>
           <a:prstGeom prst="rect">
             <a:avLst/>
@@ -6579,13 +6372,22 @@
           <a:lstStyle/>
           <a:p>
             <a:r>
-              <a:rPr sz="2080" b="0" i="0">
-                <a:solidFill>
-                  <a:srgbClr val="52514E"/>
-                </a:solidFill>
-                <a:latin typeface="Arial"/>
-              </a:rPr>
-              <a:t>public score; original</a:t>
+              <a:rPr sz="3790" b="1" i="0">
+                <a:solidFill>
+                  <a:srgbClr val="2A78D6"/>
+                </a:solidFill>
+                <a:latin typeface="Arial"/>
+              </a:rPr>
+              <a:t>CORA-v2</a:t>
+            </a:r>
+            <a:r>
+              <a:rPr sz="2460" b="1" i="0">
+                <a:solidFill>
+                  <a:srgbClr val="EB6834"/>
+                </a:solidFill>
+                <a:latin typeface="Arial"/>
+              </a:rPr>
+              <a:t> [DEVELOPMENT]</a:t>
             </a:r>
           </a:p>
         </p:txBody>
@@ -6598,8 +6400,8 @@
         </p:nvSpPr>
         <p:spPr>
           <a:xfrm>
-            <a:off x="26327506" y="12526374"/>
-            <a:ext cx="1916934" cy="264438"/>
+            <a:off x="20739748" y="24932268"/>
+            <a:ext cx="6639600" cy="360596"/>
           </a:xfrm>
           <a:prstGeom prst="rect">
             <a:avLst/>
@@ -6613,13 +6415,13 @@
           <a:lstStyle/>
           <a:p>
             <a:r>
-              <a:rPr sz="2080" b="0" i="0">
-                <a:solidFill>
-                  <a:srgbClr val="52514E"/>
-                </a:solidFill>
-                <a:latin typeface="Arial"/>
-              </a:rPr>
-              <a:t>CORA research</a:t>
+              <a:rPr sz="2840" b="0" i="0">
+                <a:solidFill>
+                  <a:srgbClr val="0B0B0B"/>
+                </a:solidFill>
+                <a:latin typeface="Arial"/>
+              </a:rPr>
+              <a:t>Keeps all fitting rules; flags thin evidence.</a:t>
             </a:r>
           </a:p>
         </p:txBody>
@@ -6632,8 +6434,8 @@
         </p:nvSpPr>
         <p:spPr>
           <a:xfrm>
-            <a:off x="20739735" y="21373963"/>
-            <a:ext cx="7759250" cy="360596"/>
+            <a:off x="20739748" y="30051539"/>
+            <a:ext cx="8069988" cy="312517"/>
           </a:xfrm>
           <a:prstGeom prst="rect">
             <a:avLst/>
@@ -6647,13 +6449,31 @@
           <a:lstStyle/>
           <a:p>
             <a:r>
-              <a:rPr sz="2840" b="1" i="0">
-                <a:solidFill>
-                  <a:srgbClr val="0B0B0B"/>
-                </a:solidFill>
-                <a:latin typeface="Arial"/>
-              </a:rPr>
-              <a:t>Can neural learning help a reasoner discover</a:t>
+              <a:rPr sz="2460" b="0" i="0">
+                <a:solidFill>
+                  <a:srgbClr val="52514E"/>
+                </a:solidFill>
+                <a:latin typeface="Arial"/>
+              </a:rPr>
+              <a:t>118 exposed tasks:</a:t>
+            </a:r>
+            <a:r>
+              <a:rPr sz="2460" b="0" i="0">
+                <a:solidFill>
+                  <a:srgbClr val="52514E"/>
+                </a:solidFill>
+                <a:latin typeface="Arial"/>
+              </a:rPr>
+              <a:t> </a:t>
+            </a:r>
+            <a:r>
+              <a:rPr sz="2460" b="0" i="0">
+                <a:solidFill>
+                  <a:srgbClr val="52514E"/>
+                </a:solidFill>
+                <a:latin typeface="Arial"/>
+              </a:rPr>
+              <a:t>4 right, 1 wrong guess; none certified.</a:t>
             </a:r>
           </a:p>
         </p:txBody>
@@ -6666,8 +6486,8 @@
         </p:nvSpPr>
         <p:spPr>
           <a:xfrm>
-            <a:off x="20739735" y="21854760"/>
-            <a:ext cx="7344931" cy="360596"/>
+            <a:off x="20739748" y="31317207"/>
+            <a:ext cx="8571622" cy="480795"/>
           </a:xfrm>
           <a:prstGeom prst="rect">
             <a:avLst/>
@@ -6681,13 +6501,22 @@
           <a:lstStyle/>
           <a:p>
             <a:r>
-              <a:rPr sz="2840" b="1" i="0">
-                <a:solidFill>
-                  <a:srgbClr val="0B0B0B"/>
-                </a:solidFill>
-                <a:latin typeface="Arial"/>
-              </a:rPr>
-              <a:t>useful representations and rules—and can</a:t>
+              <a:rPr sz="3790" b="1" i="0">
+                <a:solidFill>
+                  <a:srgbClr val="2A78D6"/>
+                </a:solidFill>
+                <a:latin typeface="Arial"/>
+              </a:rPr>
+              <a:t>From ARC to science</a:t>
+            </a:r>
+            <a:r>
+              <a:rPr sz="2460" b="1" i="0">
+                <a:solidFill>
+                  <a:srgbClr val="D03B3B"/>
+                </a:solidFill>
+                <a:latin typeface="Arial"/>
+              </a:rPr>
+              <a:t> [FUTURE, NOT TESTED]</a:t>
             </a:r>
           </a:p>
         </p:txBody>
@@ -6700,8 +6529,8 @@
         </p:nvSpPr>
         <p:spPr>
           <a:xfrm>
-            <a:off x="20739735" y="22335557"/>
-            <a:ext cx="8274186" cy="360596"/>
+            <a:off x="20739735" y="33889301"/>
+            <a:ext cx="8059985" cy="312517"/>
           </a:xfrm>
           <a:prstGeom prst="rect">
             <a:avLst/>
@@ -6715,13 +6544,31 @@
           <a:lstStyle/>
           <a:p>
             <a:r>
-              <a:rPr sz="2840" b="1" i="0">
+              <a:rPr sz="2460" b="0" i="0">
                 <a:solidFill>
                   <a:srgbClr val="0B0B0B"/>
                 </a:solidFill>
                 <a:latin typeface="Arial"/>
               </a:rPr>
-              <a:t>executable verification help it determine what to</a:t>
+              <a:t>Proteins, omics, plant phenotypes:</a:t>
+            </a:r>
+            <a:r>
+              <a:rPr sz="2460" b="0" i="0">
+                <a:solidFill>
+                  <a:srgbClr val="0B0B0B"/>
+                </a:solidFill>
+                <a:latin typeface="Arial"/>
+              </a:rPr>
+              <a:t> </a:t>
+            </a:r>
+            <a:r>
+              <a:rPr sz="2460" b="0" i="0">
+                <a:solidFill>
+                  <a:srgbClr val="0B0B0B"/>
+                </a:solidFill>
+                <a:latin typeface="Arial"/>
+              </a:rPr>
+              <a:t>only the revision policy</a:t>
             </a:r>
           </a:p>
         </p:txBody>
@@ -6734,8 +6581,8 @@
         </p:nvSpPr>
         <p:spPr>
           <a:xfrm>
-            <a:off x="20739735" y="22816354"/>
-            <a:ext cx="8561939" cy="360596"/>
+            <a:off x="20739735" y="34294188"/>
+            <a:ext cx="2002784" cy="312517"/>
           </a:xfrm>
           <a:prstGeom prst="rect">
             <a:avLst/>
@@ -6749,13 +6596,13 @@
           <a:lstStyle/>
           <a:p>
             <a:r>
-              <a:rPr sz="2840" b="1" i="0">
+              <a:rPr sz="2460" b="0" i="0">
                 <a:solidFill>
                   <a:srgbClr val="0B0B0B"/>
                 </a:solidFill>
                 <a:latin typeface="Arial"/>
               </a:rPr>
-              <a:t>change when those explanations are inadequate?</a:t>
+              <a:t>could transfer.</a:t>
             </a:r>
           </a:p>
         </p:txBody>
@@ -6768,8 +6615,8 @@
         </p:nvSpPr>
         <p:spPr>
           <a:xfrm>
-            <a:off x="20739735" y="23366133"/>
-            <a:ext cx="7729035" cy="312515"/>
+            <a:off x="1058151" y="38236717"/>
+            <a:ext cx="26321277" cy="576953"/>
           </a:xfrm>
           <a:prstGeom prst="rect">
             <a:avLst/>
@@ -6783,85 +6630,31 @@
           <a:lstStyle/>
           <a:p>
             <a:r>
-              <a:rPr sz="2460" b="0" i="0">
-                <a:solidFill>
-                  <a:srgbClr val="52514E"/>
-                </a:solidFill>
-                <a:latin typeface="Arial"/>
-              </a:rPr>
-              <a:t>Solid:</a:t>
-            </a:r>
-            <a:r>
-              <a:rPr sz="2460" b="0" i="0">
-                <a:solidFill>
-                  <a:srgbClr val="52514E"/>
+              <a:rPr sz="4540" b="1" i="0">
+                <a:solidFill>
+                  <a:srgbClr val="0B0B0B"/>
+                </a:solidFill>
+                <a:latin typeface="Arial"/>
+              </a:rPr>
+              <a:t>Building a rule is not learning which revision improves an unseen prediction.</a:t>
+            </a:r>
+            <a:r>
+              <a:rPr sz="4540" b="1" i="0">
+                <a:solidFill>
+                  <a:srgbClr val="0B0B0B"/>
                 </a:solidFill>
                 <a:latin typeface="Arial"/>
               </a:rPr>
               <a:t> </a:t>
             </a:r>
             <a:r>
-              <a:rPr sz="2460" b="0" i="0">
-                <a:solidFill>
-                  <a:srgbClr val="52514E"/>
-                </a:solidFill>
-                <a:latin typeface="Arial"/>
-              </a:rPr>
-              <a:t>existing.</a:t>
-            </a:r>
-            <a:r>
-              <a:rPr sz="2460" b="0" i="0">
-                <a:solidFill>
-                  <a:srgbClr val="52514E"/>
-                </a:solidFill>
-                <a:latin typeface="Arial"/>
-              </a:rPr>
-              <a:t> </a:t>
-            </a:r>
-            <a:r>
-              <a:rPr sz="2460" b="0" i="0">
-                <a:solidFill>
-                  <a:srgbClr val="52514E"/>
-                </a:solidFill>
-                <a:latin typeface="Arial"/>
-              </a:rPr>
-              <a:t>Dashed:</a:t>
-            </a:r>
-            <a:r>
-              <a:rPr sz="2460" b="0" i="0">
-                <a:solidFill>
-                  <a:srgbClr val="52514E"/>
-                </a:solidFill>
-                <a:latin typeface="Arial"/>
-              </a:rPr>
-              <a:t> </a:t>
-            </a:r>
-            <a:r>
-              <a:rPr sz="2460" b="0" i="0">
-                <a:solidFill>
-                  <a:srgbClr val="52514E"/>
-                </a:solidFill>
-                <a:latin typeface="Arial"/>
-              </a:rPr>
-              <a:t>proposed.</a:t>
-            </a:r>
-            <a:r>
-              <a:rPr sz="2460" b="0" i="0">
-                <a:solidFill>
-                  <a:srgbClr val="52514E"/>
-                </a:solidFill>
-                <a:latin typeface="Arial"/>
-              </a:rPr>
-              <a:t> </a:t>
-            </a:r>
-            <a:r>
-              <a:rPr sz="2460" b="0" i="0">
-                <a:solidFill>
-                  <a:srgbClr val="52514E"/>
-                </a:solidFill>
-                <a:latin typeface="Arial"/>
-              </a:rPr>
-              <a:t>The neural proposal</a:t>
+              <a:rPr sz="4540" b="1" i="0">
+                <a:solidFill>
+                  <a:srgbClr val="0B0B0B"/>
+                </a:solidFill>
+                <a:latin typeface="Arial"/>
+              </a:rPr>
+              <a:t>That is what we test.</a:t>
             </a:r>
           </a:p>
         </p:txBody>
@@ -6874,8 +6667,8 @@
         </p:nvSpPr>
         <p:spPr>
           <a:xfrm>
-            <a:off x="20739735" y="23771009"/>
-            <a:ext cx="7968422" cy="312515"/>
+            <a:off x="9571444" y="38883031"/>
+            <a:ext cx="5553286" cy="312517"/>
           </a:xfrm>
           <a:prstGeom prst="rect">
             <a:avLst/>
@@ -6891,11 +6684,29 @@
             <a:r>
               <a:rPr sz="2460" b="0" i="0">
                 <a:solidFill>
-                  <a:srgbClr val="52514E"/>
-                </a:solidFill>
-                <a:latin typeface="Arial"/>
-              </a:rPr>
-              <a:t>interface has not yet been implemented or experimentally</a:t>
+                  <a:srgbClr val="0CA30C"/>
+                </a:solidFill>
+                <a:latin typeface="Arial"/>
+              </a:rPr>
+              <a:t>[DONE]</a:t>
+            </a:r>
+            <a:r>
+              <a:rPr sz="2460" b="0" i="0">
+                <a:solidFill>
+                  <a:srgbClr val="D03B3B"/>
+                </a:solidFill>
+                <a:latin typeface="Arial"/>
+              </a:rPr>
+              <a:t> [NEGATIVE]</a:t>
+            </a:r>
+            <a:r>
+              <a:rPr sz="2460" b="0" i="0">
+                <a:solidFill>
+                  <a:srgbClr val="EB6834"/>
+                </a:solidFill>
+                <a:latin typeface="Arial"/>
+              </a:rPr>
+              <a:t> [DEVELOPMENT]</a:t>
             </a:r>
           </a:p>
         </p:txBody>
@@ -6908,8 +6719,8 @@
         </p:nvSpPr>
         <p:spPr>
           <a:xfrm>
-            <a:off x="20739735" y="24175897"/>
-            <a:ext cx="7466831" cy="312515"/>
+            <a:off x="9571444" y="39287905"/>
+            <a:ext cx="3632551" cy="312517"/>
           </a:xfrm>
           <a:prstGeom prst="rect">
             <a:avLst/>
@@ -6925,11 +6736,11 @@
             <a:r>
               <a:rPr sz="2460" b="0" i="0">
                 <a:solidFill>
-                  <a:srgbClr val="52514E"/>
-                </a:solidFill>
-                <a:latin typeface="Arial"/>
-              </a:rPr>
-              <a:t>validated; the neural model outputs answer grids only.</a:t>
+                  <a:srgbClr val="D03B3B"/>
+                </a:solidFill>
+                <a:latin typeface="Arial"/>
+              </a:rPr>
+              <a:t>[FUTURE, NOT TESTED]</a:t>
             </a:r>
           </a:p>
         </p:txBody>
@@ -6942,8 +6753,8 @@
         </p:nvSpPr>
         <p:spPr>
           <a:xfrm>
-            <a:off x="20739735" y="25441568"/>
-            <a:ext cx="4800096" cy="480795"/>
+            <a:off x="936003" y="39950147"/>
+            <a:ext cx="28454794" cy="282671"/>
           </a:xfrm>
           <a:prstGeom prst="rect">
             <a:avLst/>
@@ -6957,22 +6768,454 @@
           <a:lstStyle/>
           <a:p>
             <a:r>
-              <a:rPr sz="3790" b="1" i="0">
-                <a:solidFill>
-                  <a:srgbClr val="2A78D6"/>
-                </a:solidFill>
-                <a:latin typeface="Arial"/>
-              </a:rPr>
-              <a:t>CORA-v2</a:t>
-            </a:r>
-            <a:r>
-              <a:rPr sz="2460" b="1" i="0">
-                <a:solidFill>
-                  <a:srgbClr val="EB6834"/>
-                </a:solidFill>
-                <a:latin typeface="Arial"/>
-              </a:rPr>
-              <a:t> [DEVELOPMENT]</a:t>
+              <a:rPr sz="2080" b="0" i="0">
+                <a:solidFill>
+                  <a:srgbClr val="52514E"/>
+                </a:solidFill>
+                <a:latin typeface="Arial"/>
+              </a:rPr>
+              <a:t>Prior</a:t>
+            </a:r>
+            <a:r>
+              <a:rPr sz="2080" b="0" i="0">
+                <a:solidFill>
+                  <a:srgbClr val="52514E"/>
+                </a:solidFill>
+                <a:latin typeface="Arial"/>
+              </a:rPr>
+              <a:t> </a:t>
+            </a:r>
+            <a:r>
+              <a:rPr sz="2080" b="0" i="0">
+                <a:solidFill>
+                  <a:srgbClr val="52514E"/>
+                </a:solidFill>
+                <a:latin typeface="Arial"/>
+              </a:rPr>
+              <a:t>work:</a:t>
+            </a:r>
+            <a:r>
+              <a:rPr sz="2080" b="0" i="0">
+                <a:solidFill>
+                  <a:srgbClr val="52514E"/>
+                </a:solidFill>
+                <a:latin typeface="Arial"/>
+              </a:rPr>
+              <a:t> </a:t>
+            </a:r>
+            <a:r>
+              <a:rPr sz="2080" b="0" i="0">
+                <a:solidFill>
+                  <a:srgbClr val="52514E"/>
+                </a:solidFill>
+                <a:latin typeface="Arial"/>
+              </a:rPr>
+              <a:t>Popper,</a:t>
+            </a:r>
+            <a:r>
+              <a:rPr sz="2080" b="0" i="0">
+                <a:solidFill>
+                  <a:srgbClr val="52514E"/>
+                </a:solidFill>
+                <a:latin typeface="Arial"/>
+              </a:rPr>
+              <a:t> </a:t>
+            </a:r>
+            <a:r>
+              <a:rPr sz="2080" b="0" i="0">
+                <a:solidFill>
+                  <a:srgbClr val="52514E"/>
+                </a:solidFill>
+                <a:latin typeface="Arial"/>
+              </a:rPr>
+              <a:t>DreamCoder,</a:t>
+            </a:r>
+            <a:r>
+              <a:rPr sz="2080" b="0" i="0">
+                <a:solidFill>
+                  <a:srgbClr val="52514E"/>
+                </a:solidFill>
+                <a:latin typeface="Arial"/>
+              </a:rPr>
+              <a:t> </a:t>
+            </a:r>
+            <a:r>
+              <a:rPr sz="2080" b="0" i="0">
+                <a:solidFill>
+                  <a:srgbClr val="52514E"/>
+                </a:solidFill>
+                <a:latin typeface="Arial"/>
+              </a:rPr>
+              <a:t>LILO,</a:t>
+            </a:r>
+            <a:r>
+              <a:rPr sz="2080" b="0" i="0">
+                <a:solidFill>
+                  <a:srgbClr val="52514E"/>
+                </a:solidFill>
+                <a:latin typeface="Arial"/>
+              </a:rPr>
+              <a:t> </a:t>
+            </a:r>
+            <a:r>
+              <a:rPr sz="2080" b="0" i="0">
+                <a:solidFill>
+                  <a:srgbClr val="52514E"/>
+                </a:solidFill>
+                <a:latin typeface="Arial"/>
+              </a:rPr>
+              <a:t>Model</a:t>
+            </a:r>
+            <a:r>
+              <a:rPr sz="2080" b="0" i="0">
+                <a:solidFill>
+                  <a:srgbClr val="52514E"/>
+                </a:solidFill>
+                <a:latin typeface="Arial"/>
+              </a:rPr>
+              <a:t> </a:t>
+            </a:r>
+            <a:r>
+              <a:rPr sz="2080" b="0" i="0">
+                <a:solidFill>
+                  <a:srgbClr val="52514E"/>
+                </a:solidFill>
+                <a:latin typeface="Arial"/>
+              </a:rPr>
+              <a:t>Discovery</a:t>
+            </a:r>
+            <a:r>
+              <a:rPr sz="2080" b="0" i="0">
+                <a:solidFill>
+                  <a:srgbClr val="52514E"/>
+                </a:solidFill>
+                <a:latin typeface="Arial"/>
+              </a:rPr>
+              <a:t> </a:t>
+            </a:r>
+            <a:r>
+              <a:rPr sz="2080" b="0" i="0">
+                <a:solidFill>
+                  <a:srgbClr val="52514E"/>
+                </a:solidFill>
+                <a:latin typeface="Arial"/>
+              </a:rPr>
+              <a:t>Agent;</a:t>
+            </a:r>
+            <a:r>
+              <a:rPr sz="2080" b="0" i="0">
+                <a:solidFill>
+                  <a:srgbClr val="52514E"/>
+                </a:solidFill>
+                <a:latin typeface="Arial"/>
+              </a:rPr>
+              <a:t> </a:t>
+            </a:r>
+            <a:r>
+              <a:rPr sz="2080" b="0" i="0">
+                <a:solidFill>
+                  <a:srgbClr val="52514E"/>
+                </a:solidFill>
+                <a:latin typeface="Arial"/>
+              </a:rPr>
+              <a:t>failing</a:t>
+            </a:r>
+            <a:r>
+              <a:rPr sz="2080" b="0" i="0">
+                <a:solidFill>
+                  <a:srgbClr val="52514E"/>
+                </a:solidFill>
+                <a:latin typeface="Arial"/>
+              </a:rPr>
+              <a:t> </a:t>
+            </a:r>
+            <a:r>
+              <a:rPr sz="2080" b="0" i="0">
+                <a:solidFill>
+                  <a:srgbClr val="52514E"/>
+                </a:solidFill>
+                <a:latin typeface="Arial"/>
+              </a:rPr>
+              <a:t>and</a:t>
+            </a:r>
+            <a:r>
+              <a:rPr sz="2080" b="0" i="0">
+                <a:solidFill>
+                  <a:srgbClr val="52514E"/>
+                </a:solidFill>
+                <a:latin typeface="Arial"/>
+              </a:rPr>
+              <a:t> </a:t>
+            </a:r>
+            <a:r>
+              <a:rPr sz="2080" b="0" i="0">
+                <a:solidFill>
+                  <a:srgbClr val="52514E"/>
+                </a:solidFill>
+                <a:latin typeface="Arial"/>
+              </a:rPr>
+              <a:t>revising</a:t>
+            </a:r>
+            <a:r>
+              <a:rPr sz="2080" b="0" i="0">
+                <a:solidFill>
+                  <a:srgbClr val="52514E"/>
+                </a:solidFill>
+                <a:latin typeface="Arial"/>
+              </a:rPr>
+              <a:t> </a:t>
+            </a:r>
+            <a:r>
+              <a:rPr sz="2080" b="0" i="0">
+                <a:solidFill>
+                  <a:srgbClr val="52514E"/>
+                </a:solidFill>
+                <a:latin typeface="Arial"/>
+              </a:rPr>
+              <a:t>is</a:t>
+            </a:r>
+            <a:r>
+              <a:rPr sz="2080" b="0" i="0">
+                <a:solidFill>
+                  <a:srgbClr val="52514E"/>
+                </a:solidFill>
+                <a:latin typeface="Arial"/>
+              </a:rPr>
+              <a:t> </a:t>
+            </a:r>
+            <a:r>
+              <a:rPr sz="2080" b="0" i="0">
+                <a:solidFill>
+                  <a:srgbClr val="52514E"/>
+                </a:solidFill>
+                <a:latin typeface="Arial"/>
+              </a:rPr>
+              <a:t>not</a:t>
+            </a:r>
+            <a:r>
+              <a:rPr sz="2080" b="0" i="0">
+                <a:solidFill>
+                  <a:srgbClr val="52514E"/>
+                </a:solidFill>
+                <a:latin typeface="Arial"/>
+              </a:rPr>
+              <a:t> </a:t>
+            </a:r>
+            <a:r>
+              <a:rPr sz="2080" b="0" i="0">
+                <a:solidFill>
+                  <a:srgbClr val="52514E"/>
+                </a:solidFill>
+                <a:latin typeface="Arial"/>
+              </a:rPr>
+              <a:t>new.</a:t>
+            </a:r>
+            <a:r>
+              <a:rPr sz="2080" b="0" i="0">
+                <a:solidFill>
+                  <a:srgbClr val="52514E"/>
+                </a:solidFill>
+                <a:latin typeface="Arial"/>
+              </a:rPr>
+              <a:t> </a:t>
+            </a:r>
+            <a:r>
+              <a:rPr sz="2080" b="0" i="0">
+                <a:solidFill>
+                  <a:srgbClr val="52514E"/>
+                </a:solidFill>
+                <a:latin typeface="Arial"/>
+              </a:rPr>
+              <a:t>Neural</a:t>
+            </a:r>
+            <a:r>
+              <a:rPr sz="2080" b="0" i="0">
+                <a:solidFill>
+                  <a:srgbClr val="52514E"/>
+                </a:solidFill>
+                <a:latin typeface="Arial"/>
+              </a:rPr>
+              <a:t> </a:t>
+            </a:r>
+            <a:r>
+              <a:rPr sz="2080" b="0" i="0">
+                <a:solidFill>
+                  <a:srgbClr val="52514E"/>
+                </a:solidFill>
+                <a:latin typeface="Arial"/>
+              </a:rPr>
+              <a:t>baseline:</a:t>
+            </a:r>
+            <a:r>
+              <a:rPr sz="2080" b="0" i="0">
+                <a:solidFill>
+                  <a:srgbClr val="52514E"/>
+                </a:solidFill>
+                <a:latin typeface="Arial"/>
+              </a:rPr>
+              <a:t> </a:t>
+            </a:r>
+            <a:r>
+              <a:rPr sz="2080" b="0" i="0">
+                <a:solidFill>
+                  <a:srgbClr val="52514E"/>
+                </a:solidFill>
+                <a:latin typeface="Arial"/>
+              </a:rPr>
+              <a:t>NVARC’s</a:t>
+            </a:r>
+            <a:r>
+              <a:rPr sz="2080" b="0" i="0">
+                <a:solidFill>
+                  <a:srgbClr val="52514E"/>
+                </a:solidFill>
+                <a:latin typeface="Arial"/>
+              </a:rPr>
+              <a:t> </a:t>
+            </a:r>
+            <a:r>
+              <a:rPr sz="2080" b="0" i="0">
+                <a:solidFill>
+                  <a:srgbClr val="52514E"/>
+                </a:solidFill>
+                <a:latin typeface="Arial"/>
+              </a:rPr>
+              <a:t>published</a:t>
+            </a:r>
+            <a:r>
+              <a:rPr sz="2080" b="0" i="0">
+                <a:solidFill>
+                  <a:srgbClr val="52514E"/>
+                </a:solidFill>
+                <a:latin typeface="Arial"/>
+              </a:rPr>
+              <a:t> </a:t>
+            </a:r>
+            <a:r>
+              <a:rPr sz="2080" b="0" i="0">
+                <a:solidFill>
+                  <a:srgbClr val="52514E"/>
+                </a:solidFill>
+                <a:latin typeface="Arial"/>
+              </a:rPr>
+              <a:t>method,</a:t>
+            </a:r>
+            <a:r>
+              <a:rPr sz="2080" b="0" i="0">
+                <a:solidFill>
+                  <a:srgbClr val="52514E"/>
+                </a:solidFill>
+                <a:latin typeface="Arial"/>
+              </a:rPr>
+              <a:t> </a:t>
+            </a:r>
+            <a:r>
+              <a:rPr sz="2080" b="0" i="0">
+                <a:solidFill>
+                  <a:srgbClr val="52514E"/>
+                </a:solidFill>
+                <a:latin typeface="Arial"/>
+              </a:rPr>
+              <a:t>reproduced.</a:t>
+            </a:r>
+            <a:r>
+              <a:rPr sz="2080" b="0" i="0">
+                <a:solidFill>
+                  <a:srgbClr val="52514E"/>
+                </a:solidFill>
+                <a:latin typeface="Arial"/>
+              </a:rPr>
+              <a:t> </a:t>
+            </a:r>
+            <a:r>
+              <a:rPr sz="2080" b="0" i="0">
+                <a:solidFill>
+                  <a:srgbClr val="52514E"/>
+                </a:solidFill>
+                <a:latin typeface="Arial"/>
+              </a:rPr>
+              <a:t>Numbers:</a:t>
+            </a:r>
+            <a:r>
+              <a:rPr sz="2190" b="0" i="0">
+                <a:solidFill>
+                  <a:srgbClr val="52514E"/>
+                </a:solidFill>
+                <a:latin typeface="Courier New"/>
+              </a:rPr>
+              <a:t> </a:t>
+            </a:r>
+            <a:r>
+              <a:rPr sz="2190" b="0" i="0">
+                <a:solidFill>
+                  <a:srgbClr val="52514E"/>
+                </a:solidFill>
+                <a:latin typeface="Courier New"/>
+              </a:rPr>
+              <a:t>records/CORA_SUMMIT_CLAIM_LEDGER_20261017.md</a:t>
+            </a:r>
+            <a:r>
+              <a:rPr sz="2070" b="0" i="1">
+                <a:solidFill>
+                  <a:srgbClr val="52514E"/>
+                </a:solidFill>
+                <a:latin typeface="Arial"/>
+              </a:rPr>
+              <a:t> ·</a:t>
+            </a:r>
+            <a:r>
+              <a:rPr sz="2080" b="0" i="0">
+                <a:solidFill>
+                  <a:srgbClr val="52514E"/>
+                </a:solidFill>
+                <a:latin typeface="Arial"/>
+              </a:rPr>
+              <a:t> </a:t>
+            </a:r>
+            <a:r>
+              <a:rPr sz="2080" b="0" i="0">
+                <a:solidFill>
+                  <a:srgbClr val="52514E"/>
+                </a:solidFill>
+                <a:latin typeface="Arial"/>
+              </a:rPr>
+              <a:t>AI</a:t>
+            </a:r>
+            <a:r>
+              <a:rPr sz="2080" b="0" i="0">
+                <a:solidFill>
+                  <a:srgbClr val="52514E"/>
+                </a:solidFill>
+                <a:latin typeface="Arial"/>
+              </a:rPr>
+              <a:t> </a:t>
+            </a:r>
+            <a:r>
+              <a:rPr sz="2080" b="0" i="0">
+                <a:solidFill>
+                  <a:srgbClr val="52514E"/>
+                </a:solidFill>
+                <a:latin typeface="Arial"/>
+              </a:rPr>
+              <a:t>coding</a:t>
+            </a:r>
+            <a:r>
+              <a:rPr sz="2080" b="0" i="0">
+                <a:solidFill>
+                  <a:srgbClr val="52514E"/>
+                </a:solidFill>
+                <a:latin typeface="Arial"/>
+              </a:rPr>
+              <a:t> </a:t>
+            </a:r>
+            <a:r>
+              <a:rPr sz="2080" b="0" i="0">
+                <a:solidFill>
+                  <a:srgbClr val="52514E"/>
+                </a:solidFill>
+                <a:latin typeface="Arial"/>
+              </a:rPr>
+              <a:t>assistance</a:t>
             </a:r>
           </a:p>
         </p:txBody>
@@ -6985,8 +7228,8 @@
         </p:nvSpPr>
         <p:spPr>
           <a:xfrm>
-            <a:off x="20739735" y="26578278"/>
-            <a:ext cx="7430386" cy="360595"/>
+            <a:off x="936004" y="40291763"/>
+            <a:ext cx="3974950" cy="269378"/>
           </a:xfrm>
           <a:prstGeom prst="rect">
             <a:avLst/>
@@ -7000,486 +7243,22 @@
           <a:lstStyle/>
           <a:p>
             <a:r>
-              <a:rPr sz="2840" b="0" i="0">
-                <a:solidFill>
-                  <a:srgbClr val="0B0B0B"/>
-                </a:solidFill>
-                <a:latin typeface="Arial"/>
-              </a:rPr>
-              <a:t>Compares rival rules; records why it is unsure.</a:t>
-            </a:r>
-          </a:p>
-        </p:txBody>
-      </p:sp>
-      <p:sp>
-        <p:nvSpPr>
-          <p:cNvPr id="96" name="TextBox 95"/>
-          <p:cNvSpPr txBox="1"/>
-          <p:nvPr/>
-        </p:nvSpPr>
-        <p:spPr>
-          <a:xfrm>
-            <a:off x="20739735" y="31281392"/>
-            <a:ext cx="8226558" cy="312517"/>
-          </a:xfrm>
-          <a:prstGeom prst="rect">
-            <a:avLst/>
-          </a:prstGeom>
-          <a:noFill/>
-        </p:spPr>
-        <p:txBody>
-          <a:bodyPr wrap="none" lIns="0" rIns="0" tIns="0" bIns="0">
-            <a:spAutoFit/>
-          </a:bodyPr>
-          <a:lstStyle/>
-          <a:p>
-            <a:r>
-              <a:rPr sz="2460" b="0" i="0">
-                <a:solidFill>
-                  <a:srgbClr val="52514E"/>
-                </a:solidFill>
-                <a:latin typeface="Arial"/>
-              </a:rPr>
-              <a:t>On 118 exposed development tasks:</a:t>
-            </a:r>
-            <a:r>
-              <a:rPr sz="2460" b="0" i="0">
-                <a:solidFill>
-                  <a:srgbClr val="52514E"/>
-                </a:solidFill>
-                <a:latin typeface="Arial"/>
-              </a:rPr>
-              <a:t> </a:t>
-            </a:r>
-            <a:r>
-              <a:rPr sz="2460" b="0" i="0">
-                <a:solidFill>
-                  <a:srgbClr val="52514E"/>
-                </a:solidFill>
-                <a:latin typeface="Arial"/>
-              </a:rPr>
-              <a:t>4 correct and 1 wrong</a:t>
-            </a:r>
-          </a:p>
-        </p:txBody>
-      </p:sp>
-      <p:sp>
-        <p:nvSpPr>
-          <p:cNvPr id="97" name="TextBox 96"/>
-          <p:cNvSpPr txBox="1"/>
-          <p:nvPr/>
-        </p:nvSpPr>
-        <p:spPr>
-          <a:xfrm>
-            <a:off x="20739735" y="31686270"/>
-            <a:ext cx="5323284" cy="312517"/>
-          </a:xfrm>
-          <a:prstGeom prst="rect">
-            <a:avLst/>
-          </a:prstGeom>
-          <a:noFill/>
-        </p:spPr>
-        <p:txBody>
-          <a:bodyPr wrap="none" lIns="0" rIns="0" tIns="0" bIns="0">
-            <a:spAutoFit/>
-          </a:bodyPr>
-          <a:lstStyle/>
-          <a:p>
-            <a:r>
-              <a:rPr sz="2460" b="0" i="0">
-                <a:solidFill>
-                  <a:srgbClr val="52514E"/>
-                </a:solidFill>
-                <a:latin typeface="Arial"/>
-              </a:rPr>
-              <a:t>exploratory guesses; nothing certified.</a:t>
-            </a:r>
-          </a:p>
-        </p:txBody>
-      </p:sp>
-      <p:sp>
-        <p:nvSpPr>
-          <p:cNvPr id="98" name="TextBox 97"/>
-          <p:cNvSpPr txBox="1"/>
-          <p:nvPr/>
-        </p:nvSpPr>
-        <p:spPr>
-          <a:xfrm>
-            <a:off x="20739735" y="32951939"/>
-            <a:ext cx="8571622" cy="480795"/>
-          </a:xfrm>
-          <a:prstGeom prst="rect">
-            <a:avLst/>
-          </a:prstGeom>
-          <a:noFill/>
-        </p:spPr>
-        <p:txBody>
-          <a:bodyPr wrap="none" lIns="0" rIns="0" tIns="0" bIns="0">
-            <a:spAutoFit/>
-          </a:bodyPr>
-          <a:lstStyle/>
-          <a:p>
-            <a:r>
-              <a:rPr sz="3790" b="1" i="0">
-                <a:solidFill>
-                  <a:srgbClr val="2A78D6"/>
-                </a:solidFill>
-                <a:latin typeface="Arial"/>
-              </a:rPr>
-              <a:t>From ARC to science</a:t>
-            </a:r>
-            <a:r>
-              <a:rPr sz="2460" b="1" i="0">
-                <a:solidFill>
-                  <a:srgbClr val="D03B3B"/>
-                </a:solidFill>
-                <a:latin typeface="Arial"/>
-              </a:rPr>
-              <a:t> [FUTURE, NOT TESTED]</a:t>
-            </a:r>
-          </a:p>
-        </p:txBody>
-      </p:sp>
-      <p:sp>
-        <p:nvSpPr>
-          <p:cNvPr id="99" name="TextBox 98"/>
-          <p:cNvSpPr txBox="1"/>
-          <p:nvPr/>
-        </p:nvSpPr>
-        <p:spPr>
-          <a:xfrm>
-            <a:off x="20739735" y="36308496"/>
-            <a:ext cx="7874353" cy="312517"/>
-          </a:xfrm>
-          <a:prstGeom prst="rect">
-            <a:avLst/>
-          </a:prstGeom>
-          <a:noFill/>
-        </p:spPr>
-        <p:txBody>
-          <a:bodyPr wrap="none" lIns="0" rIns="0" tIns="0" bIns="0">
-            <a:spAutoFit/>
-          </a:bodyPr>
-          <a:lstStyle/>
-          <a:p>
-            <a:r>
-              <a:rPr sz="2460" b="0" i="0">
-                <a:solidFill>
-                  <a:srgbClr val="0B0B0B"/>
-                </a:solidFill>
-                <a:latin typeface="Arial"/>
-              </a:rPr>
-              <a:t>Possible targets:</a:t>
-            </a:r>
-            <a:r>
-              <a:rPr sz="2460" b="0" i="0">
-                <a:solidFill>
-                  <a:srgbClr val="0B0B0B"/>
-                </a:solidFill>
-                <a:latin typeface="Arial"/>
-              </a:rPr>
-              <a:t> </a:t>
-            </a:r>
-            <a:r>
-              <a:rPr sz="2460" b="0" i="0">
-                <a:solidFill>
-                  <a:srgbClr val="0B0B0B"/>
-                </a:solidFill>
-                <a:latin typeface="Arial"/>
-              </a:rPr>
-              <a:t>proteins, omics data, plant phenotypes,</a:t>
-            </a:r>
-          </a:p>
-        </p:txBody>
-      </p:sp>
-      <p:sp>
-        <p:nvSpPr>
-          <p:cNvPr id="100" name="TextBox 99"/>
-          <p:cNvSpPr txBox="1"/>
-          <p:nvPr/>
-        </p:nvSpPr>
-        <p:spPr>
-          <a:xfrm>
-            <a:off x="20739735" y="36713374"/>
-            <a:ext cx="7815907" cy="312517"/>
-          </a:xfrm>
-          <a:prstGeom prst="rect">
-            <a:avLst/>
-          </a:prstGeom>
-          <a:noFill/>
-        </p:spPr>
-        <p:txBody>
-          <a:bodyPr wrap="none" lIns="0" rIns="0" tIns="0" bIns="0">
-            <a:spAutoFit/>
-          </a:bodyPr>
-          <a:lstStyle/>
-          <a:p>
-            <a:r>
-              <a:rPr sz="2460" b="0" i="0">
-                <a:solidFill>
-                  <a:srgbClr val="0B0B0B"/>
-                </a:solidFill>
-                <a:latin typeface="Arial"/>
-              </a:rPr>
-              <a:t>maize lesion-mimic pathways.</a:t>
-            </a:r>
-            <a:r>
-              <a:rPr sz="2460" b="0" i="0">
-                <a:solidFill>
-                  <a:srgbClr val="0B0B0B"/>
-                </a:solidFill>
-                <a:latin typeface="Arial"/>
-              </a:rPr>
-              <a:t> </a:t>
-            </a:r>
-            <a:r>
-              <a:rPr sz="2460" b="0" i="0">
-                <a:solidFill>
-                  <a:srgbClr val="0B0B0B"/>
-                </a:solidFill>
-                <a:latin typeface="Arial"/>
-              </a:rPr>
-              <a:t>What could transfer is the</a:t>
-            </a:r>
-          </a:p>
-        </p:txBody>
-      </p:sp>
-      <p:sp>
-        <p:nvSpPr>
-          <p:cNvPr id="101" name="TextBox 100"/>
-          <p:cNvSpPr txBox="1"/>
-          <p:nvPr/>
-        </p:nvSpPr>
-        <p:spPr>
-          <a:xfrm>
-            <a:off x="20739735" y="37118264"/>
-            <a:ext cx="4952324" cy="312517"/>
-          </a:xfrm>
-          <a:prstGeom prst="rect">
-            <a:avLst/>
-          </a:prstGeom>
-          <a:noFill/>
-        </p:spPr>
-        <p:txBody>
-          <a:bodyPr wrap="none" lIns="0" rIns="0" tIns="0" bIns="0">
-            <a:spAutoFit/>
-          </a:bodyPr>
-          <a:lstStyle/>
-          <a:p>
-            <a:r>
-              <a:rPr sz="2460" b="0" i="0">
-                <a:solidFill>
-                  <a:srgbClr val="0B0B0B"/>
-                </a:solidFill>
-                <a:latin typeface="Arial"/>
-              </a:rPr>
-              <a:t>revision policy, not ARC operations.</a:t>
-            </a:r>
-          </a:p>
-        </p:txBody>
-      </p:sp>
-      <p:sp>
-        <p:nvSpPr>
-          <p:cNvPr id="102" name="TextBox 101"/>
-          <p:cNvSpPr txBox="1"/>
-          <p:nvPr/>
-        </p:nvSpPr>
-        <p:spPr>
-          <a:xfrm>
-            <a:off x="1055624" y="39128027"/>
-            <a:ext cx="26033379" cy="576953"/>
-          </a:xfrm>
-          <a:prstGeom prst="rect">
-            <a:avLst/>
-          </a:prstGeom>
-          <a:noFill/>
-        </p:spPr>
-        <p:txBody>
-          <a:bodyPr wrap="none" lIns="0" rIns="0" tIns="0" bIns="0">
-            <a:spAutoFit/>
-          </a:bodyPr>
-          <a:lstStyle/>
-          <a:p>
-            <a:r>
-              <a:rPr sz="4540" b="1" i="0">
-                <a:solidFill>
-                  <a:srgbClr val="0B0B0B"/>
-                </a:solidFill>
-                <a:latin typeface="Arial"/>
-              </a:rPr>
-              <a:t>Building a rule is not the same as learning which revision improves an unseen prediction.</a:t>
-            </a:r>
-            <a:r>
-              <a:rPr sz="4540" b="1" i="0">
-                <a:solidFill>
-                  <a:srgbClr val="0B0B0B"/>
-                </a:solidFill>
-                <a:latin typeface="Arial"/>
-              </a:rPr>
-              <a:t> </a:t>
-            </a:r>
-            <a:r>
-              <a:rPr sz="4540" b="1" i="0">
-                <a:solidFill>
-                  <a:srgbClr val="0B0B0B"/>
-                </a:solidFill>
-                <a:latin typeface="Arial"/>
-              </a:rPr>
-              <a:t>That is</a:t>
-            </a:r>
-          </a:p>
-        </p:txBody>
-      </p:sp>
-      <p:sp>
-        <p:nvSpPr>
-          <p:cNvPr id="103" name="TextBox 102"/>
-          <p:cNvSpPr txBox="1"/>
-          <p:nvPr/>
-        </p:nvSpPr>
-        <p:spPr>
-          <a:xfrm>
-            <a:off x="1055624" y="39689940"/>
-            <a:ext cx="6938485" cy="576953"/>
-          </a:xfrm>
-          <a:prstGeom prst="rect">
-            <a:avLst/>
-          </a:prstGeom>
-          <a:noFill/>
-        </p:spPr>
-        <p:txBody>
-          <a:bodyPr wrap="none" lIns="0" rIns="0" tIns="0" bIns="0">
-            <a:spAutoFit/>
-          </a:bodyPr>
-          <a:lstStyle/>
-          <a:p>
-            <a:r>
-              <a:rPr sz="4540" b="1" i="0">
-                <a:solidFill>
-                  <a:srgbClr val="0B0B0B"/>
-                </a:solidFill>
-                <a:latin typeface="Arial"/>
-              </a:rPr>
-              <a:t>what we are trying to test.</a:t>
-            </a:r>
-          </a:p>
-        </p:txBody>
-      </p:sp>
-      <p:sp>
-        <p:nvSpPr>
-          <p:cNvPr id="104" name="TextBox 103"/>
-          <p:cNvSpPr txBox="1"/>
-          <p:nvPr/>
-        </p:nvSpPr>
-        <p:spPr>
-          <a:xfrm>
-            <a:off x="20728916" y="39767926"/>
-            <a:ext cx="5553293" cy="312517"/>
-          </a:xfrm>
-          <a:prstGeom prst="rect">
-            <a:avLst/>
-          </a:prstGeom>
-          <a:noFill/>
-        </p:spPr>
-        <p:txBody>
-          <a:bodyPr wrap="none" lIns="0" rIns="0" tIns="0" bIns="0">
-            <a:spAutoFit/>
-          </a:bodyPr>
-          <a:lstStyle/>
-          <a:p>
-            <a:r>
-              <a:rPr sz="2460" b="0" i="0">
-                <a:solidFill>
-                  <a:srgbClr val="0CA30C"/>
-                </a:solidFill>
-                <a:latin typeface="Arial"/>
-              </a:rPr>
-              <a:t>[DONE]</a:t>
-            </a:r>
-            <a:r>
-              <a:rPr sz="2460" b="0" i="0">
-                <a:solidFill>
-                  <a:srgbClr val="D03B3B"/>
-                </a:solidFill>
-                <a:latin typeface="Arial"/>
-              </a:rPr>
-              <a:t> [NEGATIVE]</a:t>
-            </a:r>
-            <a:r>
-              <a:rPr sz="2460" b="0" i="0">
-                <a:solidFill>
-                  <a:srgbClr val="EB6834"/>
-                </a:solidFill>
-                <a:latin typeface="Arial"/>
-              </a:rPr>
-              <a:t> [DEVELOPMENT]</a:t>
-            </a:r>
-          </a:p>
-        </p:txBody>
-      </p:sp>
-      <p:sp>
-        <p:nvSpPr>
-          <p:cNvPr id="105" name="TextBox 104"/>
-          <p:cNvSpPr txBox="1"/>
-          <p:nvPr/>
-        </p:nvSpPr>
-        <p:spPr>
-          <a:xfrm>
-            <a:off x="20728916" y="40172800"/>
-            <a:ext cx="3632561" cy="312517"/>
-          </a:xfrm>
-          <a:prstGeom prst="rect">
-            <a:avLst/>
-          </a:prstGeom>
-          <a:noFill/>
-        </p:spPr>
-        <p:txBody>
-          <a:bodyPr wrap="none" lIns="0" rIns="0" tIns="0" bIns="0">
-            <a:spAutoFit/>
-          </a:bodyPr>
-          <a:lstStyle/>
-          <a:p>
-            <a:r>
-              <a:rPr sz="2460" b="0" i="0">
-                <a:solidFill>
-                  <a:srgbClr val="D03B3B"/>
-                </a:solidFill>
-                <a:latin typeface="Arial"/>
-              </a:rPr>
-              <a:t>[FUTURE, NOT TESTED]</a:t>
-            </a:r>
-          </a:p>
-        </p:txBody>
-      </p:sp>
-      <p:sp>
-        <p:nvSpPr>
-          <p:cNvPr id="106" name="TextBox 105"/>
-          <p:cNvSpPr txBox="1"/>
-          <p:nvPr/>
-        </p:nvSpPr>
-        <p:spPr>
-          <a:xfrm>
-            <a:off x="936003" y="40839981"/>
-            <a:ext cx="28454906" cy="264439"/>
-          </a:xfrm>
-          <a:prstGeom prst="rect">
-            <a:avLst/>
-          </a:prstGeom>
-          <a:noFill/>
-        </p:spPr>
-        <p:txBody>
-          <a:bodyPr wrap="none" lIns="0" rIns="0" tIns="0" bIns="0">
-            <a:spAutoFit/>
-          </a:bodyPr>
-          <a:lstStyle/>
-          <a:p>
-            <a:r>
               <a:rPr sz="2080" b="0" i="0">
                 <a:solidFill>
                   <a:srgbClr val="52514E"/>
                 </a:solidFill>
                 <a:latin typeface="Arial"/>
               </a:rPr>
-              <a:t>Related</a:t>
+              <a:t>used</a:t>
+            </a:r>
+            <a:r>
+              <a:rPr sz="2070" b="0" i="1">
+                <a:solidFill>
+                  <a:srgbClr val="52514E"/>
+                </a:solidFill>
+                <a:latin typeface="Arial"/>
+              </a:rPr>
+              <a:t> ·</a:t>
             </a:r>
             <a:r>
               <a:rPr sz="2080" b="0" i="0">
@@ -7488,1254 +7267,7 @@
                 </a:solidFill>
                 <a:latin typeface="Arial"/>
               </a:rPr>
-              <a:t> </a:t>
-            </a:r>
-            <a:r>
-              <a:rPr sz="2080" b="0" i="0">
-                <a:solidFill>
-                  <a:srgbClr val="52514E"/>
-                </a:solidFill>
-                <a:latin typeface="Arial"/>
-              </a:rPr>
-              <a:t>work</a:t>
-            </a:r>
-            <a:r>
-              <a:rPr sz="2080" b="0" i="0">
-                <a:solidFill>
-                  <a:srgbClr val="52514E"/>
-                </a:solidFill>
-                <a:latin typeface="Arial"/>
-              </a:rPr>
-              <a:t> </a:t>
-            </a:r>
-            <a:r>
-              <a:rPr sz="2080" b="0" i="0">
-                <a:solidFill>
-                  <a:srgbClr val="52514E"/>
-                </a:solidFill>
-                <a:latin typeface="Arial"/>
-              </a:rPr>
-              <a:t>(explainer,</a:t>
-            </a:r>
-            <a:r>
-              <a:rPr sz="2080" b="0" i="0">
-                <a:solidFill>
-                  <a:srgbClr val="52514E"/>
-                </a:solidFill>
-                <a:latin typeface="Arial"/>
-              </a:rPr>
-              <a:t> </a:t>
-            </a:r>
-            <a:r>
-              <a:rPr sz="2080" b="0" i="0">
-                <a:solidFill>
-                  <a:srgbClr val="52514E"/>
-                </a:solidFill>
-                <a:latin typeface="Arial"/>
-              </a:rPr>
-              <a:t>section</a:t>
-            </a:r>
-            <a:r>
-              <a:rPr sz="2080" b="0" i="0">
-                <a:solidFill>
-                  <a:srgbClr val="52514E"/>
-                </a:solidFill>
-                <a:latin typeface="Arial"/>
-              </a:rPr>
-              <a:t> </a:t>
-            </a:r>
-            <a:r>
-              <a:rPr sz="2080" b="0" i="0">
-                <a:solidFill>
-                  <a:srgbClr val="52514E"/>
-                </a:solidFill>
-                <a:latin typeface="Arial"/>
-              </a:rPr>
-              <a:t>9):</a:t>
-            </a:r>
-            <a:r>
-              <a:rPr sz="2080" b="0" i="0">
-                <a:solidFill>
-                  <a:srgbClr val="52514E"/>
-                </a:solidFill>
-                <a:latin typeface="Arial"/>
-              </a:rPr>
-              <a:t> </a:t>
-            </a:r>
-            <a:r>
-              <a:rPr sz="2080" b="0" i="0">
-                <a:solidFill>
-                  <a:srgbClr val="52514E"/>
-                </a:solidFill>
-                <a:latin typeface="Arial"/>
-              </a:rPr>
-              <a:t>Popper</a:t>
-            </a:r>
-            <a:r>
-              <a:rPr sz="2080" b="0" i="0">
-                <a:solidFill>
-                  <a:srgbClr val="52514E"/>
-                </a:solidFill>
-                <a:latin typeface="Arial"/>
-              </a:rPr>
-              <a:t> </a:t>
-            </a:r>
-            <a:r>
-              <a:rPr sz="2080" b="0" i="0">
-                <a:solidFill>
-                  <a:srgbClr val="52514E"/>
-                </a:solidFill>
-                <a:latin typeface="Arial"/>
-              </a:rPr>
-              <a:t>(Cropper</a:t>
-            </a:r>
-            <a:r>
-              <a:rPr sz="2080" b="0" i="0">
-                <a:solidFill>
-                  <a:srgbClr val="52514E"/>
-                </a:solidFill>
-                <a:latin typeface="Arial"/>
-              </a:rPr>
-              <a:t> </a:t>
-            </a:r>
-            <a:r>
-              <a:rPr sz="2080" b="0" i="0">
-                <a:solidFill>
-                  <a:srgbClr val="52514E"/>
-                </a:solidFill>
-                <a:latin typeface="Arial"/>
-              </a:rPr>
-              <a:t>&amp;</a:t>
-            </a:r>
-            <a:r>
-              <a:rPr sz="2080" b="0" i="0">
-                <a:solidFill>
-                  <a:srgbClr val="52514E"/>
-                </a:solidFill>
-                <a:latin typeface="Arial"/>
-              </a:rPr>
-              <a:t> </a:t>
-            </a:r>
-            <a:r>
-              <a:rPr sz="2080" b="0" i="0">
-                <a:solidFill>
-                  <a:srgbClr val="52514E"/>
-                </a:solidFill>
-                <a:latin typeface="Arial"/>
-              </a:rPr>
-              <a:t>Morel</a:t>
-            </a:r>
-            <a:r>
-              <a:rPr sz="2080" b="0" i="0">
-                <a:solidFill>
-                  <a:srgbClr val="52514E"/>
-                </a:solidFill>
-                <a:latin typeface="Arial"/>
-              </a:rPr>
-              <a:t> </a:t>
-            </a:r>
-            <a:r>
-              <a:rPr sz="2080" b="0" i="0">
-                <a:solidFill>
-                  <a:srgbClr val="52514E"/>
-                </a:solidFill>
-                <a:latin typeface="Arial"/>
-              </a:rPr>
-              <a:t>2021);</a:t>
-            </a:r>
-            <a:r>
-              <a:rPr sz="2080" b="0" i="0">
-                <a:solidFill>
-                  <a:srgbClr val="52514E"/>
-                </a:solidFill>
-                <a:latin typeface="Arial"/>
-              </a:rPr>
-              <a:t> </a:t>
-            </a:r>
-            <a:r>
-              <a:rPr sz="2080" b="0" i="0">
-                <a:solidFill>
-                  <a:srgbClr val="52514E"/>
-                </a:solidFill>
-                <a:latin typeface="Arial"/>
-              </a:rPr>
-              <a:t>DreamCoder</a:t>
-            </a:r>
-            <a:r>
-              <a:rPr sz="2080" b="0" i="0">
-                <a:solidFill>
-                  <a:srgbClr val="52514E"/>
-                </a:solidFill>
-                <a:latin typeface="Arial"/>
-              </a:rPr>
-              <a:t> </a:t>
-            </a:r>
-            <a:r>
-              <a:rPr sz="2080" b="0" i="0">
-                <a:solidFill>
-                  <a:srgbClr val="52514E"/>
-                </a:solidFill>
-                <a:latin typeface="Arial"/>
-              </a:rPr>
-              <a:t>(Ellis</a:t>
-            </a:r>
-            <a:r>
-              <a:rPr sz="2080" b="0" i="0">
-                <a:solidFill>
-                  <a:srgbClr val="52514E"/>
-                </a:solidFill>
-                <a:latin typeface="Arial"/>
-              </a:rPr>
-              <a:t> </a:t>
-            </a:r>
-            <a:r>
-              <a:rPr sz="2080" b="0" i="0">
-                <a:solidFill>
-                  <a:srgbClr val="52514E"/>
-                </a:solidFill>
-                <a:latin typeface="Arial"/>
-              </a:rPr>
-              <a:t>et</a:t>
-            </a:r>
-            <a:r>
-              <a:rPr sz="2080" b="0" i="0">
-                <a:solidFill>
-                  <a:srgbClr val="52514E"/>
-                </a:solidFill>
-                <a:latin typeface="Arial"/>
-              </a:rPr>
-              <a:t> </a:t>
-            </a:r>
-            <a:r>
-              <a:rPr sz="2080" b="0" i="0">
-                <a:solidFill>
-                  <a:srgbClr val="52514E"/>
-                </a:solidFill>
-                <a:latin typeface="Arial"/>
-              </a:rPr>
-              <a:t>al.</a:t>
-            </a:r>
-            <a:r>
-              <a:rPr sz="2080" b="0" i="0">
-                <a:solidFill>
-                  <a:srgbClr val="52514E"/>
-                </a:solidFill>
-                <a:latin typeface="Arial"/>
-              </a:rPr>
-              <a:t> </a:t>
-            </a:r>
-            <a:r>
-              <a:rPr sz="2080" b="0" i="0">
-                <a:solidFill>
-                  <a:srgbClr val="52514E"/>
-                </a:solidFill>
-                <a:latin typeface="Arial"/>
-              </a:rPr>
-              <a:t>2021);</a:t>
-            </a:r>
-            <a:r>
-              <a:rPr sz="2080" b="0" i="0">
-                <a:solidFill>
-                  <a:srgbClr val="52514E"/>
-                </a:solidFill>
-                <a:latin typeface="Arial"/>
-              </a:rPr>
-              <a:t> </a:t>
-            </a:r>
-            <a:r>
-              <a:rPr sz="2080" b="0" i="0">
-                <a:solidFill>
-                  <a:srgbClr val="52514E"/>
-                </a:solidFill>
-                <a:latin typeface="Arial"/>
-              </a:rPr>
-              <a:t>LILO</a:t>
-            </a:r>
-            <a:r>
-              <a:rPr sz="2080" b="0" i="0">
-                <a:solidFill>
-                  <a:srgbClr val="52514E"/>
-                </a:solidFill>
-                <a:latin typeface="Arial"/>
-              </a:rPr>
-              <a:t> </a:t>
-            </a:r>
-            <a:r>
-              <a:rPr sz="2080" b="0" i="0">
-                <a:solidFill>
-                  <a:srgbClr val="52514E"/>
-                </a:solidFill>
-                <a:latin typeface="Arial"/>
-              </a:rPr>
-              <a:t>(Grand</a:t>
-            </a:r>
-            <a:r>
-              <a:rPr sz="2080" b="0" i="0">
-                <a:solidFill>
-                  <a:srgbClr val="52514E"/>
-                </a:solidFill>
-                <a:latin typeface="Arial"/>
-              </a:rPr>
-              <a:t> </a:t>
-            </a:r>
-            <a:r>
-              <a:rPr sz="2080" b="0" i="0">
-                <a:solidFill>
-                  <a:srgbClr val="52514E"/>
-                </a:solidFill>
-                <a:latin typeface="Arial"/>
-              </a:rPr>
-              <a:t>et</a:t>
-            </a:r>
-            <a:r>
-              <a:rPr sz="2080" b="0" i="0">
-                <a:solidFill>
-                  <a:srgbClr val="52514E"/>
-                </a:solidFill>
-                <a:latin typeface="Arial"/>
-              </a:rPr>
-              <a:t> </a:t>
-            </a:r>
-            <a:r>
-              <a:rPr sz="2080" b="0" i="0">
-                <a:solidFill>
-                  <a:srgbClr val="52514E"/>
-                </a:solidFill>
-                <a:latin typeface="Arial"/>
-              </a:rPr>
-              <a:t>al.</a:t>
-            </a:r>
-            <a:r>
-              <a:rPr sz="2080" b="0" i="0">
-                <a:solidFill>
-                  <a:srgbClr val="52514E"/>
-                </a:solidFill>
-                <a:latin typeface="Arial"/>
-              </a:rPr>
-              <a:t> </a:t>
-            </a:r>
-            <a:r>
-              <a:rPr sz="2080" b="0" i="0">
-                <a:solidFill>
-                  <a:srgbClr val="52514E"/>
-                </a:solidFill>
-                <a:latin typeface="Arial"/>
-              </a:rPr>
-              <a:t>2024);</a:t>
-            </a:r>
-            <a:r>
-              <a:rPr sz="2080" b="0" i="0">
-                <a:solidFill>
-                  <a:srgbClr val="52514E"/>
-                </a:solidFill>
-                <a:latin typeface="Arial"/>
-              </a:rPr>
-              <a:t> </a:t>
-            </a:r>
-            <a:r>
-              <a:rPr sz="2080" b="0" i="0">
-                <a:solidFill>
-                  <a:srgbClr val="52514E"/>
-                </a:solidFill>
-                <a:latin typeface="Arial"/>
-              </a:rPr>
-              <a:t>Model</a:t>
-            </a:r>
-            <a:r>
-              <a:rPr sz="2080" b="0" i="0">
-                <a:solidFill>
-                  <a:srgbClr val="52514E"/>
-                </a:solidFill>
-                <a:latin typeface="Arial"/>
-              </a:rPr>
-              <a:t> </a:t>
-            </a:r>
-            <a:r>
-              <a:rPr sz="2080" b="0" i="0">
-                <a:solidFill>
-                  <a:srgbClr val="52514E"/>
-                </a:solidFill>
-                <a:latin typeface="Arial"/>
-              </a:rPr>
-              <a:t>Discovery</a:t>
-            </a:r>
-            <a:r>
-              <a:rPr sz="2080" b="0" i="0">
-                <a:solidFill>
-                  <a:srgbClr val="52514E"/>
-                </a:solidFill>
-                <a:latin typeface="Arial"/>
-              </a:rPr>
-              <a:t> </a:t>
-            </a:r>
-            <a:r>
-              <a:rPr sz="2080" b="0" i="0">
-                <a:solidFill>
-                  <a:srgbClr val="52514E"/>
-                </a:solidFill>
-                <a:latin typeface="Arial"/>
-              </a:rPr>
-              <a:t>Agent</a:t>
-            </a:r>
-            <a:r>
-              <a:rPr sz="2080" b="0" i="0">
-                <a:solidFill>
-                  <a:srgbClr val="52514E"/>
-                </a:solidFill>
-                <a:latin typeface="Arial"/>
-              </a:rPr>
-              <a:t> </a:t>
-            </a:r>
-            <a:r>
-              <a:rPr sz="2080" b="0" i="0">
-                <a:solidFill>
-                  <a:srgbClr val="52514E"/>
-                </a:solidFill>
-                <a:latin typeface="Arial"/>
-              </a:rPr>
-              <a:t>(Murphy</a:t>
-            </a:r>
-            <a:r>
-              <a:rPr sz="2080" b="0" i="0">
-                <a:solidFill>
-                  <a:srgbClr val="52514E"/>
-                </a:solidFill>
-                <a:latin typeface="Arial"/>
-              </a:rPr>
-              <a:t> </a:t>
-            </a:r>
-            <a:r>
-              <a:rPr sz="2080" b="0" i="0">
-                <a:solidFill>
-                  <a:srgbClr val="52514E"/>
-                </a:solidFill>
-                <a:latin typeface="Arial"/>
-              </a:rPr>
-              <a:t>2026).</a:t>
-            </a:r>
-            <a:r>
-              <a:rPr sz="2080" b="0" i="0">
-                <a:solidFill>
-                  <a:srgbClr val="52514E"/>
-                </a:solidFill>
-                <a:latin typeface="Arial"/>
-              </a:rPr>
-              <a:t> </a:t>
-            </a:r>
-            <a:r>
-              <a:rPr sz="2080" b="0" i="0">
-                <a:solidFill>
-                  <a:srgbClr val="52514E"/>
-                </a:solidFill>
-                <a:latin typeface="Arial"/>
-              </a:rPr>
-              <a:t>The</a:t>
-            </a:r>
-            <a:r>
-              <a:rPr sz="2080" b="0" i="0">
-                <a:solidFill>
-                  <a:srgbClr val="52514E"/>
-                </a:solidFill>
-                <a:latin typeface="Arial"/>
-              </a:rPr>
-              <a:t> </a:t>
-            </a:r>
-            <a:r>
-              <a:rPr sz="2080" b="0" i="0">
-                <a:solidFill>
-                  <a:srgbClr val="52514E"/>
-                </a:solidFill>
-                <a:latin typeface="Arial"/>
-              </a:rPr>
-              <a:t>failure-to-revision</a:t>
-            </a:r>
-            <a:r>
-              <a:rPr sz="2080" b="0" i="0">
-                <a:solidFill>
-                  <a:srgbClr val="52514E"/>
-                </a:solidFill>
-                <a:latin typeface="Arial"/>
-              </a:rPr>
-              <a:t> </a:t>
-            </a:r>
-            <a:r>
-              <a:rPr sz="2080" b="0" i="0">
-                <a:solidFill>
-                  <a:srgbClr val="52514E"/>
-                </a:solidFill>
-                <a:latin typeface="Arial"/>
-              </a:rPr>
-              <a:t>idea</a:t>
-            </a:r>
-            <a:r>
-              <a:rPr sz="2080" b="0" i="0">
-                <a:solidFill>
-                  <a:srgbClr val="52514E"/>
-                </a:solidFill>
-                <a:latin typeface="Arial"/>
-              </a:rPr>
-              <a:t> </a:t>
-            </a:r>
-            <a:r>
-              <a:rPr sz="2080" b="0" i="0">
-                <a:solidFill>
-                  <a:srgbClr val="52514E"/>
-                </a:solidFill>
-                <a:latin typeface="Arial"/>
-              </a:rPr>
-              <a:t>is</a:t>
-            </a:r>
-            <a:r>
-              <a:rPr sz="2080" b="0" i="0">
-                <a:solidFill>
-                  <a:srgbClr val="52514E"/>
-                </a:solidFill>
-                <a:latin typeface="Arial"/>
-              </a:rPr>
-              <a:t> </a:t>
-            </a:r>
-            <a:r>
-              <a:rPr sz="2080" b="0" i="0">
-                <a:solidFill>
-                  <a:srgbClr val="52514E"/>
-                </a:solidFill>
-                <a:latin typeface="Arial"/>
-              </a:rPr>
-              <a:t>not</a:t>
-            </a:r>
-            <a:r>
-              <a:rPr sz="2080" b="0" i="0">
-                <a:solidFill>
-                  <a:srgbClr val="52514E"/>
-                </a:solidFill>
-                <a:latin typeface="Arial"/>
-              </a:rPr>
-              <a:t> </a:t>
-            </a:r>
-            <a:r>
-              <a:rPr sz="2080" b="0" i="0">
-                <a:solidFill>
-                  <a:srgbClr val="52514E"/>
-                </a:solidFill>
-                <a:latin typeface="Arial"/>
-              </a:rPr>
-              <a:t>new;</a:t>
-            </a:r>
-            <a:r>
-              <a:rPr sz="2080" b="0" i="0">
-                <a:solidFill>
-                  <a:srgbClr val="52514E"/>
-                </a:solidFill>
-                <a:latin typeface="Arial"/>
-              </a:rPr>
-              <a:t> </a:t>
-            </a:r>
-            <a:r>
-              <a:rPr sz="2080" b="0" i="0">
-                <a:solidFill>
-                  <a:srgbClr val="52514E"/>
-                </a:solidFill>
-                <a:latin typeface="Arial"/>
-              </a:rPr>
-              <a:t>the</a:t>
-            </a:r>
-            <a:r>
-              <a:rPr sz="2080" b="0" i="0">
-                <a:solidFill>
-                  <a:srgbClr val="52514E"/>
-                </a:solidFill>
-                <a:latin typeface="Arial"/>
-              </a:rPr>
-              <a:t> </a:t>
-            </a:r>
-            <a:r>
-              <a:rPr sz="2080" b="0" i="0">
-                <a:solidFill>
-                  <a:srgbClr val="52514E"/>
-                </a:solidFill>
-                <a:latin typeface="Arial"/>
-              </a:rPr>
-              <a:t>question</a:t>
-            </a:r>
-            <a:r>
-              <a:rPr sz="2080" b="0" i="0">
-                <a:solidFill>
-                  <a:srgbClr val="52514E"/>
-                </a:solidFill>
-                <a:latin typeface="Arial"/>
-              </a:rPr>
-              <a:t> </a:t>
-            </a:r>
-            <a:r>
-              <a:rPr sz="2080" b="0" i="0">
-                <a:solidFill>
-                  <a:srgbClr val="52514E"/>
-                </a:solidFill>
-                <a:latin typeface="Arial"/>
-              </a:rPr>
-              <a:t>is</a:t>
-            </a:r>
-            <a:r>
-              <a:rPr sz="2080" b="0" i="0">
-                <a:solidFill>
-                  <a:srgbClr val="52514E"/>
-                </a:solidFill>
-                <a:latin typeface="Arial"/>
-              </a:rPr>
-              <a:t> </a:t>
-            </a:r>
-            <a:r>
-              <a:rPr sz="2080" b="0" i="0">
-                <a:solidFill>
-                  <a:srgbClr val="52514E"/>
-                </a:solidFill>
-                <a:latin typeface="Arial"/>
-              </a:rPr>
-              <a:t>which</a:t>
-            </a:r>
-            <a:r>
-              <a:rPr sz="2080" b="0" i="0">
-                <a:solidFill>
-                  <a:srgbClr val="52514E"/>
-                </a:solidFill>
-                <a:latin typeface="Arial"/>
-              </a:rPr>
-              <a:t> </a:t>
-            </a:r>
-            <a:r>
-              <a:rPr sz="2080" b="0" i="0">
-                <a:solidFill>
-                  <a:srgbClr val="52514E"/>
-                </a:solidFill>
-                <a:latin typeface="Arial"/>
-              </a:rPr>
-              <a:t>component</a:t>
-            </a:r>
-          </a:p>
-        </p:txBody>
-      </p:sp>
-      <p:sp>
-        <p:nvSpPr>
-          <p:cNvPr id="107" name="TextBox 106"/>
-          <p:cNvSpPr txBox="1"/>
-          <p:nvPr/>
-        </p:nvSpPr>
-        <p:spPr>
-          <a:xfrm>
-            <a:off x="936003" y="41181597"/>
-            <a:ext cx="28454903" cy="264439"/>
-          </a:xfrm>
-          <a:prstGeom prst="rect">
-            <a:avLst/>
-          </a:prstGeom>
-          <a:noFill/>
-        </p:spPr>
-        <p:txBody>
-          <a:bodyPr wrap="none" lIns="0" rIns="0" tIns="0" bIns="0">
-            <a:spAutoFit/>
-          </a:bodyPr>
-          <a:lstStyle/>
-          <a:p>
-            <a:r>
-              <a:rPr sz="2080" b="0" i="0">
-                <a:solidFill>
-                  <a:srgbClr val="52514E"/>
-                </a:solidFill>
-                <a:latin typeface="Arial"/>
-              </a:rPr>
-              <a:t>to</a:t>
-            </a:r>
-            <a:r>
-              <a:rPr sz="2080" b="0" i="0">
-                <a:solidFill>
-                  <a:srgbClr val="52514E"/>
-                </a:solidFill>
-                <a:latin typeface="Arial"/>
-              </a:rPr>
-              <a:t> </a:t>
-            </a:r>
-            <a:r>
-              <a:rPr sz="2080" b="0" i="0">
-                <a:solidFill>
-                  <a:srgbClr val="52514E"/>
-                </a:solidFill>
-                <a:latin typeface="Arial"/>
-              </a:rPr>
-              <a:t>revise,</a:t>
-            </a:r>
-            <a:r>
-              <a:rPr sz="2080" b="0" i="0">
-                <a:solidFill>
-                  <a:srgbClr val="52514E"/>
-                </a:solidFill>
-                <a:latin typeface="Arial"/>
-              </a:rPr>
-              <a:t> </a:t>
-            </a:r>
-            <a:r>
-              <a:rPr sz="2080" b="0" i="0">
-                <a:solidFill>
-                  <a:srgbClr val="52514E"/>
-                </a:solidFill>
-                <a:latin typeface="Arial"/>
-              </a:rPr>
-              <a:t>against</a:t>
-            </a:r>
-            <a:r>
-              <a:rPr sz="2080" b="0" i="0">
-                <a:solidFill>
-                  <a:srgbClr val="52514E"/>
-                </a:solidFill>
-                <a:latin typeface="Arial"/>
-              </a:rPr>
-              <a:t> </a:t>
-            </a:r>
-            <a:r>
-              <a:rPr sz="2080" b="0" i="0">
-                <a:solidFill>
-                  <a:srgbClr val="52514E"/>
-                </a:solidFill>
-                <a:latin typeface="Arial"/>
-              </a:rPr>
-              <a:t>matched</a:t>
-            </a:r>
-            <a:r>
-              <a:rPr sz="2080" b="0" i="0">
-                <a:solidFill>
-                  <a:srgbClr val="52514E"/>
-                </a:solidFill>
-                <a:latin typeface="Arial"/>
-              </a:rPr>
-              <a:t> </a:t>
-            </a:r>
-            <a:r>
-              <a:rPr sz="2080" b="0" i="0">
-                <a:solidFill>
-                  <a:srgbClr val="52514E"/>
-                </a:solidFill>
-                <a:latin typeface="Arial"/>
-              </a:rPr>
-              <a:t>controls.</a:t>
-            </a:r>
-            <a:r>
-              <a:rPr sz="2080" b="0" i="0">
-                <a:solidFill>
-                  <a:srgbClr val="52514E"/>
-                </a:solidFill>
-                <a:latin typeface="Arial"/>
-              </a:rPr>
-              <a:t> </a:t>
-            </a:r>
-            <a:r>
-              <a:rPr sz="2080" b="0" i="0">
-                <a:solidFill>
-                  <a:srgbClr val="52514E"/>
-                </a:solidFill>
-                <a:latin typeface="Arial"/>
-              </a:rPr>
-              <a:t>Neural</a:t>
-            </a:r>
-            <a:r>
-              <a:rPr sz="2080" b="0" i="0">
-                <a:solidFill>
-                  <a:srgbClr val="52514E"/>
-                </a:solidFill>
-                <a:latin typeface="Arial"/>
-              </a:rPr>
-              <a:t> </a:t>
-            </a:r>
-            <a:r>
-              <a:rPr sz="2080" b="0" i="0">
-                <a:solidFill>
-                  <a:srgbClr val="52514E"/>
-                </a:solidFill>
-                <a:latin typeface="Arial"/>
-              </a:rPr>
-              <a:t>baseline:</a:t>
-            </a:r>
-            <a:r>
-              <a:rPr sz="2080" b="0" i="0">
-                <a:solidFill>
-                  <a:srgbClr val="52514E"/>
-                </a:solidFill>
-                <a:latin typeface="Arial"/>
-              </a:rPr>
-              <a:t> </a:t>
-            </a:r>
-            <a:r>
-              <a:rPr sz="2080" b="0" i="0">
-                <a:solidFill>
-                  <a:srgbClr val="52514E"/>
-                </a:solidFill>
-                <a:latin typeface="Arial"/>
-              </a:rPr>
-              <a:t>the</a:t>
-            </a:r>
-            <a:r>
-              <a:rPr sz="2080" b="0" i="0">
-                <a:solidFill>
-                  <a:srgbClr val="52514E"/>
-                </a:solidFill>
-                <a:latin typeface="Arial"/>
-              </a:rPr>
-              <a:t> </a:t>
-            </a:r>
-            <a:r>
-              <a:rPr sz="2080" b="0" i="0">
-                <a:solidFill>
-                  <a:srgbClr val="52514E"/>
-                </a:solidFill>
-                <a:latin typeface="Arial"/>
-              </a:rPr>
-              <a:t>NVARC</a:t>
-            </a:r>
-            <a:r>
-              <a:rPr sz="2080" b="0" i="0">
-                <a:solidFill>
-                  <a:srgbClr val="52514E"/>
-                </a:solidFill>
-                <a:latin typeface="Arial"/>
-              </a:rPr>
-              <a:t> </a:t>
-            </a:r>
-            <a:r>
-              <a:rPr sz="2080" b="0" i="0">
-                <a:solidFill>
-                  <a:srgbClr val="52514E"/>
-                </a:solidFill>
-                <a:latin typeface="Arial"/>
-              </a:rPr>
-              <a:t>team’s</a:t>
-            </a:r>
-            <a:r>
-              <a:rPr sz="2080" b="0" i="0">
-                <a:solidFill>
-                  <a:srgbClr val="52514E"/>
-                </a:solidFill>
-                <a:latin typeface="Arial"/>
-              </a:rPr>
-              <a:t> </a:t>
-            </a:r>
-            <a:r>
-              <a:rPr sz="2080" b="0" i="0">
-                <a:solidFill>
-                  <a:srgbClr val="52514E"/>
-                </a:solidFill>
-                <a:latin typeface="Arial"/>
-              </a:rPr>
-              <a:t>published</a:t>
-            </a:r>
-            <a:r>
-              <a:rPr sz="2080" b="0" i="0">
-                <a:solidFill>
-                  <a:srgbClr val="52514E"/>
-                </a:solidFill>
-                <a:latin typeface="Arial"/>
-              </a:rPr>
-              <a:t> </a:t>
-            </a:r>
-            <a:r>
-              <a:rPr sz="2080" b="0" i="0">
-                <a:solidFill>
-                  <a:srgbClr val="52514E"/>
-                </a:solidFill>
-                <a:latin typeface="Arial"/>
-              </a:rPr>
-              <a:t>method</a:t>
-            </a:r>
-            <a:r>
-              <a:rPr sz="2080" b="0" i="0">
-                <a:solidFill>
-                  <a:srgbClr val="52514E"/>
-                </a:solidFill>
-                <a:latin typeface="Arial"/>
-              </a:rPr>
-              <a:t> </a:t>
-            </a:r>
-            <a:r>
-              <a:rPr sz="2080" b="0" i="0">
-                <a:solidFill>
-                  <a:srgbClr val="52514E"/>
-                </a:solidFill>
-                <a:latin typeface="Arial"/>
-              </a:rPr>
-              <a:t>and</a:t>
-            </a:r>
-            <a:r>
-              <a:rPr sz="2080" b="0" i="0">
-                <a:solidFill>
-                  <a:srgbClr val="52514E"/>
-                </a:solidFill>
-                <a:latin typeface="Arial"/>
-              </a:rPr>
-              <a:t> </a:t>
-            </a:r>
-            <a:r>
-              <a:rPr sz="2080" b="0" i="0">
-                <a:solidFill>
-                  <a:srgbClr val="52514E"/>
-                </a:solidFill>
-                <a:latin typeface="Arial"/>
-              </a:rPr>
-              <a:t>Qwen3-4B</a:t>
-            </a:r>
-            <a:r>
-              <a:rPr sz="2080" b="0" i="0">
-                <a:solidFill>
-                  <a:srgbClr val="52514E"/>
-                </a:solidFill>
-                <a:latin typeface="Arial"/>
-              </a:rPr>
-              <a:t> </a:t>
-            </a:r>
-            <a:r>
-              <a:rPr sz="2080" b="0" i="0">
-                <a:solidFill>
-                  <a:srgbClr val="52514E"/>
-                </a:solidFill>
-                <a:latin typeface="Arial"/>
-              </a:rPr>
-              <a:t>checkpoint,</a:t>
-            </a:r>
-            <a:r>
-              <a:rPr sz="2080" b="0" i="0">
-                <a:solidFill>
-                  <a:srgbClr val="52514E"/>
-                </a:solidFill>
-                <a:latin typeface="Arial"/>
-              </a:rPr>
-              <a:t> </a:t>
-            </a:r>
-            <a:r>
-              <a:rPr sz="2080" b="0" i="0">
-                <a:solidFill>
-                  <a:srgbClr val="52514E"/>
-                </a:solidFill>
-                <a:latin typeface="Arial"/>
-              </a:rPr>
-              <a:t>reproduced.</a:t>
-            </a:r>
-            <a:r>
-              <a:rPr sz="2080" b="0" i="0">
-                <a:solidFill>
-                  <a:srgbClr val="52514E"/>
-                </a:solidFill>
-                <a:latin typeface="Arial"/>
-              </a:rPr>
-              <a:t> </a:t>
-            </a:r>
-            <a:r>
-              <a:rPr sz="2080" b="0" i="0">
-                <a:solidFill>
-                  <a:srgbClr val="52514E"/>
-                </a:solidFill>
-                <a:latin typeface="Arial"/>
-              </a:rPr>
-              <a:t>A</a:t>
-            </a:r>
-            <a:r>
-              <a:rPr sz="2080" b="0" i="0">
-                <a:solidFill>
-                  <a:srgbClr val="52514E"/>
-                </a:solidFill>
-                <a:latin typeface="Arial"/>
-              </a:rPr>
-              <a:t> </a:t>
-            </a:r>
-            <a:r>
-              <a:rPr sz="2080" b="0" i="0">
-                <a:solidFill>
-                  <a:srgbClr val="52514E"/>
-                </a:solidFill>
-                <a:latin typeface="Arial"/>
-              </a:rPr>
-              <a:t>separate</a:t>
-            </a:r>
-            <a:r>
-              <a:rPr sz="2080" b="0" i="0">
-                <a:solidFill>
-                  <a:srgbClr val="52514E"/>
-                </a:solidFill>
-                <a:latin typeface="Arial"/>
-              </a:rPr>
-              <a:t> </a:t>
-            </a:r>
-            <a:r>
-              <a:rPr sz="2080" b="0" i="0">
-                <a:solidFill>
-                  <a:srgbClr val="52514E"/>
-                </a:solidFill>
-                <a:latin typeface="Arial"/>
-              </a:rPr>
-              <a:t>CORA</a:t>
-            </a:r>
-            <a:r>
-              <a:rPr sz="2080" b="0" i="0">
-                <a:solidFill>
-                  <a:srgbClr val="52514E"/>
-                </a:solidFill>
-                <a:latin typeface="Arial"/>
-              </a:rPr>
-              <a:t> </a:t>
-            </a:r>
-            <a:r>
-              <a:rPr sz="2080" b="0" i="0">
-                <a:solidFill>
-                  <a:srgbClr val="52514E"/>
-                </a:solidFill>
-                <a:latin typeface="Arial"/>
-              </a:rPr>
-              <a:t>experiment</a:t>
-            </a:r>
-            <a:r>
-              <a:rPr sz="2080" b="0" i="0">
-                <a:solidFill>
-                  <a:srgbClr val="52514E"/>
-                </a:solidFill>
-                <a:latin typeface="Arial"/>
-              </a:rPr>
-              <a:t> </a:t>
-            </a:r>
-            <a:r>
-              <a:rPr sz="2080" b="0" i="0">
-                <a:solidFill>
-                  <a:srgbClr val="52514E"/>
-                </a:solidFill>
-                <a:latin typeface="Arial"/>
-              </a:rPr>
-              <a:t>on</a:t>
-            </a:r>
-            <a:r>
-              <a:rPr sz="2080" b="0" i="0">
-                <a:solidFill>
-                  <a:srgbClr val="52514E"/>
-                </a:solidFill>
-                <a:latin typeface="Arial"/>
-              </a:rPr>
-              <a:t> </a:t>
-            </a:r>
-            <a:r>
-              <a:rPr sz="2080" b="0" i="0">
-                <a:solidFill>
-                  <a:srgbClr val="52514E"/>
-                </a:solidFill>
-                <a:latin typeface="Arial"/>
-              </a:rPr>
-              <a:t>inventing</a:t>
-            </a:r>
-            <a:r>
-              <a:rPr sz="2080" b="0" i="0">
-                <a:solidFill>
-                  <a:srgbClr val="52514E"/>
-                </a:solidFill>
-                <a:latin typeface="Arial"/>
-              </a:rPr>
-              <a:t> </a:t>
-            </a:r>
-            <a:r>
-              <a:rPr sz="2080" b="0" i="0">
-                <a:solidFill>
-                  <a:srgbClr val="52514E"/>
-                </a:solidFill>
-                <a:latin typeface="Arial"/>
-              </a:rPr>
-              <a:t>new</a:t>
-            </a:r>
-            <a:r>
-              <a:rPr sz="2080" b="0" i="0">
-                <a:solidFill>
-                  <a:srgbClr val="52514E"/>
-                </a:solidFill>
-                <a:latin typeface="Arial"/>
-              </a:rPr>
-              <a:t> </a:t>
-            </a:r>
-            <a:r>
-              <a:rPr sz="2080" b="0" i="0">
-                <a:solidFill>
-                  <a:srgbClr val="52514E"/>
-                </a:solidFill>
-                <a:latin typeface="Arial"/>
-              </a:rPr>
-              <a:t>operations</a:t>
-            </a:r>
-            <a:r>
-              <a:rPr sz="2080" b="0" i="0">
-                <a:solidFill>
-                  <a:srgbClr val="52514E"/>
-                </a:solidFill>
-                <a:latin typeface="Arial"/>
-              </a:rPr>
-              <a:t> </a:t>
-            </a:r>
-            <a:r>
-              <a:rPr sz="2080" b="0" i="0">
-                <a:solidFill>
-                  <a:srgbClr val="52514E"/>
-                </a:solidFill>
-                <a:latin typeface="Arial"/>
-              </a:rPr>
-              <a:t>is</a:t>
-            </a:r>
-            <a:r>
-              <a:rPr sz="2080" b="0" i="0">
-                <a:solidFill>
-                  <a:srgbClr val="52514E"/>
-                </a:solidFill>
-                <a:latin typeface="Arial"/>
-              </a:rPr>
-              <a:t> </a:t>
-            </a:r>
-            <a:r>
-              <a:rPr sz="2080" b="0" i="0">
-                <a:solidFill>
-                  <a:srgbClr val="52514E"/>
-                </a:solidFill>
-                <a:latin typeface="Arial"/>
-              </a:rPr>
-              <a:t>running</a:t>
-            </a:r>
-            <a:r>
-              <a:rPr sz="2080" b="0" i="0">
-                <a:solidFill>
-                  <a:srgbClr val="52514E"/>
-                </a:solidFill>
-                <a:latin typeface="Arial"/>
-              </a:rPr>
-              <a:t> </a:t>
-            </a:r>
-            <a:r>
-              <a:rPr sz="2080" b="0" i="0">
-                <a:solidFill>
-                  <a:srgbClr val="52514E"/>
-                </a:solidFill>
-                <a:latin typeface="Arial"/>
-              </a:rPr>
-              <a:t>(explainer,</a:t>
-            </a:r>
-            <a:r>
-              <a:rPr sz="2080" b="0" i="0">
-                <a:solidFill>
-                  <a:srgbClr val="52514E"/>
-                </a:solidFill>
-                <a:latin typeface="Arial"/>
-              </a:rPr>
-              <a:t> </a:t>
-            </a:r>
-            <a:r>
-              <a:rPr sz="2080" b="0" i="0">
-                <a:solidFill>
-                  <a:srgbClr val="52514E"/>
-                </a:solidFill>
-                <a:latin typeface="Arial"/>
-              </a:rPr>
-              <a:t>section</a:t>
-            </a:r>
-            <a:r>
-              <a:rPr sz="2080" b="0" i="0">
-                <a:solidFill>
-                  <a:srgbClr val="52514E"/>
-                </a:solidFill>
-                <a:latin typeface="Arial"/>
-              </a:rPr>
-              <a:t> </a:t>
-            </a:r>
-            <a:r>
-              <a:rPr sz="2080" b="0" i="0">
-                <a:solidFill>
-                  <a:srgbClr val="52514E"/>
-                </a:solidFill>
-                <a:latin typeface="Arial"/>
-              </a:rPr>
-              <a:t>7).</a:t>
-            </a:r>
-            <a:r>
-              <a:rPr sz="2080" b="0" i="0">
-                <a:solidFill>
-                  <a:srgbClr val="52514E"/>
-                </a:solidFill>
-                <a:latin typeface="Arial"/>
-              </a:rPr>
-              <a:t> </a:t>
-            </a:r>
-            <a:r>
-              <a:rPr sz="2080" b="0" i="0">
-                <a:solidFill>
-                  <a:srgbClr val="52514E"/>
-                </a:solidFill>
-                <a:latin typeface="Arial"/>
-              </a:rPr>
-              <a:t>Numbers:</a:t>
-            </a:r>
-          </a:p>
-        </p:txBody>
-      </p:sp>
-      <p:sp>
-        <p:nvSpPr>
-          <p:cNvPr id="108" name="TextBox 107"/>
-          <p:cNvSpPr txBox="1"/>
-          <p:nvPr/>
-        </p:nvSpPr>
-        <p:spPr>
-          <a:xfrm>
-            <a:off x="936003" y="41518275"/>
-            <a:ext cx="17875530" cy="282671"/>
-          </a:xfrm>
-          <a:prstGeom prst="rect">
-            <a:avLst/>
-          </a:prstGeom>
-          <a:noFill/>
-        </p:spPr>
-        <p:txBody>
-          <a:bodyPr wrap="none" lIns="0" rIns="0" tIns="0" bIns="0">
-            <a:spAutoFit/>
-          </a:bodyPr>
-          <a:lstStyle/>
-          <a:p>
-            <a:r>
-              <a:rPr sz="2190" b="0" i="0">
-                <a:solidFill>
-                  <a:srgbClr val="52514E"/>
-                </a:solidFill>
-                <a:latin typeface="Courier New"/>
-              </a:rPr>
-              <a:t>records/CORA_SUMMIT_CLAIM_LEDGER_20261017.md</a:t>
-            </a:r>
-            <a:r>
-              <a:rPr sz="2070" b="0" i="1">
-                <a:solidFill>
-                  <a:srgbClr val="52514E"/>
-                </a:solidFill>
-                <a:latin typeface="Arial"/>
-              </a:rPr>
-              <a:t> ·</a:t>
-            </a:r>
-            <a:r>
-              <a:rPr sz="2080" b="0" i="0">
-                <a:solidFill>
-                  <a:srgbClr val="52514E"/>
-                </a:solidFill>
-                <a:latin typeface="Arial"/>
-              </a:rPr>
-              <a:t> AI coding assistance used for parts of the code and text</a:t>
-            </a:r>
-            <a:r>
-              <a:rPr sz="2070" b="0" i="1">
-                <a:solidFill>
-                  <a:srgbClr val="52514E"/>
-                </a:solidFill>
-                <a:latin typeface="Arial"/>
-              </a:rPr>
-              <a:t> ·</a:t>
-            </a:r>
-            <a:r>
-              <a:rPr sz="2080" b="0" i="0">
-                <a:solidFill>
-                  <a:srgbClr val="52514E"/>
-                </a:solidFill>
-                <a:latin typeface="Arial"/>
-              </a:rPr>
-              <a:t> authorship pending collaborator review.</a:t>
+              <a:t> authorship pending review.</a:t>
             </a:r>
           </a:p>
         </p:txBody>
